--- a/public/fun/cards/creative/creative-36.pptx
+++ b/public/fun/cards/creative/creative-36.pptx
@@ -3085,7 +3085,7 @@
     <p:bg>
       <p:bgPr>
         <a:solidFill>
-          <a:srgbClr val="29465B"/>
+          <a:srgbClr val="0E1116"/>
         </a:solidFill>
         <a:effectLst/>
       </p:bgPr>
@@ -3099,20 +3099,20 @@
       <p:grpSpPr/>
       <p:sp>
         <p:nvSpPr>
-          <p:cNvPr id="2" name="Rectangle 1"/>
+          <p:cNvPr id="2" name="Oval 1"/>
           <p:cNvSpPr/>
           <p:nvPr/>
         </p:nvSpPr>
         <p:spPr>
           <a:xfrm>
-            <a:off x="0" y="1339200"/>
-            <a:ext cx="3240000" cy="460800"/>
-          </a:xfrm>
-          <a:prstGeom prst="rect">
+            <a:off x="2646000" y="234000"/>
+            <a:ext cx="36000" cy="36000"/>
+          </a:xfrm>
+          <a:prstGeom prst="ellipse">
             <a:avLst/>
           </a:prstGeom>
           <a:solidFill>
-            <a:srgbClr val="7CA1BC"/>
+            <a:srgbClr val="00C2C0"/>
           </a:solidFill>
           <a:ln>
             <a:noFill/>
@@ -3128,22 +3128,20 @@
       </p:sp>
       <p:sp>
         <p:nvSpPr>
-          <p:cNvPr id="3" name="Rounded Rectangle 2"/>
+          <p:cNvPr id="3" name="Oval 2"/>
           <p:cNvSpPr/>
           <p:nvPr/>
         </p:nvSpPr>
         <p:spPr>
           <a:xfrm>
-            <a:off x="2705760" y="352800"/>
-            <a:ext cx="348480" cy="237600"/>
-          </a:xfrm>
-          <a:prstGeom prst="roundRect">
-            <a:avLst>
-              <a:gd name="adj" fmla="val 16666"/>
-            </a:avLst>
+            <a:off x="2646000" y="334800"/>
+            <a:ext cx="36000" cy="36000"/>
+          </a:xfrm>
+          <a:prstGeom prst="ellipse">
+            <a:avLst/>
           </a:prstGeom>
           <a:solidFill>
-            <a:srgbClr val="7CA1BC"/>
+            <a:srgbClr val="26292D"/>
           </a:solidFill>
           <a:ln>
             <a:noFill/>
@@ -3159,22 +3157,20 @@
       </p:sp>
       <p:sp>
         <p:nvSpPr>
-          <p:cNvPr id="4" name="Rounded Rectangle 3"/>
+          <p:cNvPr id="4" name="Oval 3"/>
           <p:cNvSpPr/>
           <p:nvPr/>
         </p:nvSpPr>
         <p:spPr>
           <a:xfrm>
-            <a:off x="2816640" y="297360"/>
-            <a:ext cx="126720" cy="63360"/>
-          </a:xfrm>
-          <a:prstGeom prst="roundRect">
-            <a:avLst>
-              <a:gd name="adj" fmla="val 25000"/>
-            </a:avLst>
+            <a:off x="2646000" y="435600"/>
+            <a:ext cx="36000" cy="36000"/>
+          </a:xfrm>
+          <a:prstGeom prst="ellipse">
+            <a:avLst/>
           </a:prstGeom>
           <a:solidFill>
-            <a:srgbClr val="7CA1BC"/>
+            <a:srgbClr val="26292D"/>
           </a:solidFill>
           <a:ln>
             <a:noFill/>
@@ -3196,14 +3192,14 @@
         </p:nvSpPr>
         <p:spPr>
           <a:xfrm>
-            <a:off x="2796840" y="388440"/>
-            <a:ext cx="166320" cy="166320"/>
+            <a:off x="2646000" y="536400"/>
+            <a:ext cx="36000" cy="36000"/>
           </a:xfrm>
           <a:prstGeom prst="ellipse">
             <a:avLst/>
           </a:prstGeom>
           <a:solidFill>
-            <a:srgbClr val="4B6475"/>
+            <a:srgbClr val="00C2C0"/>
           </a:solidFill>
           <a:ln>
             <a:noFill/>
@@ -3225,14 +3221,14 @@
         </p:nvSpPr>
         <p:spPr>
           <a:xfrm>
-            <a:off x="2836440" y="428040"/>
-            <a:ext cx="87120" cy="87120"/>
+            <a:off x="2746800" y="234000"/>
+            <a:ext cx="36000" cy="36000"/>
           </a:xfrm>
           <a:prstGeom prst="ellipse">
             <a:avLst/>
           </a:prstGeom>
           <a:solidFill>
-            <a:srgbClr val="7CA1BC"/>
+            <a:srgbClr val="26292D"/>
           </a:solidFill>
           <a:ln>
             <a:noFill/>
@@ -3248,14 +3244,449 @@
       </p:sp>
       <p:sp>
         <p:nvSpPr>
-          <p:cNvPr id="7" name="텍스트"/>
+          <p:cNvPr id="7" name="Oval 6"/>
+          <p:cNvSpPr/>
+          <p:nvPr/>
+        </p:nvSpPr>
+        <p:spPr>
+          <a:xfrm>
+            <a:off x="2746800" y="334800"/>
+            <a:ext cx="36000" cy="36000"/>
+          </a:xfrm>
+          <a:prstGeom prst="ellipse">
+            <a:avLst/>
+          </a:prstGeom>
+          <a:solidFill>
+            <a:srgbClr val="26292D"/>
+          </a:solidFill>
+          <a:ln>
+            <a:noFill/>
+          </a:ln>
+        </p:spPr>
+        <p:txBody>
+          <a:bodyPr rtlCol="0" anchor="ctr"/>
+          <a:lstStyle/>
+          <a:p>
+            <a:pPr algn="ctr"/>
+          </a:p>
+        </p:txBody>
+      </p:sp>
+      <p:sp>
+        <p:nvSpPr>
+          <p:cNvPr id="8" name="Oval 7"/>
+          <p:cNvSpPr/>
+          <p:nvPr/>
+        </p:nvSpPr>
+        <p:spPr>
+          <a:xfrm>
+            <a:off x="2746800" y="435600"/>
+            <a:ext cx="36000" cy="36000"/>
+          </a:xfrm>
+          <a:prstGeom prst="ellipse">
+            <a:avLst/>
+          </a:prstGeom>
+          <a:solidFill>
+            <a:srgbClr val="00C2C0"/>
+          </a:solidFill>
+          <a:ln>
+            <a:noFill/>
+          </a:ln>
+        </p:spPr>
+        <p:txBody>
+          <a:bodyPr rtlCol="0" anchor="ctr"/>
+          <a:lstStyle/>
+          <a:p>
+            <a:pPr algn="ctr"/>
+          </a:p>
+        </p:txBody>
+      </p:sp>
+      <p:sp>
+        <p:nvSpPr>
+          <p:cNvPr id="9" name="Oval 8"/>
+          <p:cNvSpPr/>
+          <p:nvPr/>
+        </p:nvSpPr>
+        <p:spPr>
+          <a:xfrm>
+            <a:off x="2746800" y="536400"/>
+            <a:ext cx="36000" cy="36000"/>
+          </a:xfrm>
+          <a:prstGeom prst="ellipse">
+            <a:avLst/>
+          </a:prstGeom>
+          <a:solidFill>
+            <a:srgbClr val="26292D"/>
+          </a:solidFill>
+          <a:ln>
+            <a:noFill/>
+          </a:ln>
+        </p:spPr>
+        <p:txBody>
+          <a:bodyPr rtlCol="0" anchor="ctr"/>
+          <a:lstStyle/>
+          <a:p>
+            <a:pPr algn="ctr"/>
+          </a:p>
+        </p:txBody>
+      </p:sp>
+      <p:sp>
+        <p:nvSpPr>
+          <p:cNvPr id="10" name="Oval 9"/>
+          <p:cNvSpPr/>
+          <p:nvPr/>
+        </p:nvSpPr>
+        <p:spPr>
+          <a:xfrm>
+            <a:off x="2847600" y="234000"/>
+            <a:ext cx="36000" cy="36000"/>
+          </a:xfrm>
+          <a:prstGeom prst="ellipse">
+            <a:avLst/>
+          </a:prstGeom>
+          <a:solidFill>
+            <a:srgbClr val="26292D"/>
+          </a:solidFill>
+          <a:ln>
+            <a:noFill/>
+          </a:ln>
+        </p:spPr>
+        <p:txBody>
+          <a:bodyPr rtlCol="0" anchor="ctr"/>
+          <a:lstStyle/>
+          <a:p>
+            <a:pPr algn="ctr"/>
+          </a:p>
+        </p:txBody>
+      </p:sp>
+      <p:sp>
+        <p:nvSpPr>
+          <p:cNvPr id="11" name="Oval 10"/>
+          <p:cNvSpPr/>
+          <p:nvPr/>
+        </p:nvSpPr>
+        <p:spPr>
+          <a:xfrm>
+            <a:off x="2847600" y="334800"/>
+            <a:ext cx="36000" cy="36000"/>
+          </a:xfrm>
+          <a:prstGeom prst="ellipse">
+            <a:avLst/>
+          </a:prstGeom>
+          <a:solidFill>
+            <a:srgbClr val="00C2C0"/>
+          </a:solidFill>
+          <a:ln>
+            <a:noFill/>
+          </a:ln>
+        </p:spPr>
+        <p:txBody>
+          <a:bodyPr rtlCol="0" anchor="ctr"/>
+          <a:lstStyle/>
+          <a:p>
+            <a:pPr algn="ctr"/>
+          </a:p>
+        </p:txBody>
+      </p:sp>
+      <p:sp>
+        <p:nvSpPr>
+          <p:cNvPr id="12" name="Oval 11"/>
+          <p:cNvSpPr/>
+          <p:nvPr/>
+        </p:nvSpPr>
+        <p:spPr>
+          <a:xfrm>
+            <a:off x="2847600" y="435600"/>
+            <a:ext cx="36000" cy="36000"/>
+          </a:xfrm>
+          <a:prstGeom prst="ellipse">
+            <a:avLst/>
+          </a:prstGeom>
+          <a:solidFill>
+            <a:srgbClr val="26292D"/>
+          </a:solidFill>
+          <a:ln>
+            <a:noFill/>
+          </a:ln>
+        </p:spPr>
+        <p:txBody>
+          <a:bodyPr rtlCol="0" anchor="ctr"/>
+          <a:lstStyle/>
+          <a:p>
+            <a:pPr algn="ctr"/>
+          </a:p>
+        </p:txBody>
+      </p:sp>
+      <p:sp>
+        <p:nvSpPr>
+          <p:cNvPr id="13" name="Oval 12"/>
+          <p:cNvSpPr/>
+          <p:nvPr/>
+        </p:nvSpPr>
+        <p:spPr>
+          <a:xfrm>
+            <a:off x="2847600" y="536400"/>
+            <a:ext cx="36000" cy="36000"/>
+          </a:xfrm>
+          <a:prstGeom prst="ellipse">
+            <a:avLst/>
+          </a:prstGeom>
+          <a:solidFill>
+            <a:srgbClr val="26292D"/>
+          </a:solidFill>
+          <a:ln>
+            <a:noFill/>
+          </a:ln>
+        </p:spPr>
+        <p:txBody>
+          <a:bodyPr rtlCol="0" anchor="ctr"/>
+          <a:lstStyle/>
+          <a:p>
+            <a:pPr algn="ctr"/>
+          </a:p>
+        </p:txBody>
+      </p:sp>
+      <p:sp>
+        <p:nvSpPr>
+          <p:cNvPr id="14" name="Oval 13"/>
+          <p:cNvSpPr/>
+          <p:nvPr/>
+        </p:nvSpPr>
+        <p:spPr>
+          <a:xfrm>
+            <a:off x="2948400" y="234000"/>
+            <a:ext cx="36000" cy="36000"/>
+          </a:xfrm>
+          <a:prstGeom prst="ellipse">
+            <a:avLst/>
+          </a:prstGeom>
+          <a:solidFill>
+            <a:srgbClr val="00C2C0"/>
+          </a:solidFill>
+          <a:ln>
+            <a:noFill/>
+          </a:ln>
+        </p:spPr>
+        <p:txBody>
+          <a:bodyPr rtlCol="0" anchor="ctr"/>
+          <a:lstStyle/>
+          <a:p>
+            <a:pPr algn="ctr"/>
+          </a:p>
+        </p:txBody>
+      </p:sp>
+      <p:sp>
+        <p:nvSpPr>
+          <p:cNvPr id="15" name="Oval 14"/>
+          <p:cNvSpPr/>
+          <p:nvPr/>
+        </p:nvSpPr>
+        <p:spPr>
+          <a:xfrm>
+            <a:off x="2948400" y="334800"/>
+            <a:ext cx="36000" cy="36000"/>
+          </a:xfrm>
+          <a:prstGeom prst="ellipse">
+            <a:avLst/>
+          </a:prstGeom>
+          <a:solidFill>
+            <a:srgbClr val="26292D"/>
+          </a:solidFill>
+          <a:ln>
+            <a:noFill/>
+          </a:ln>
+        </p:spPr>
+        <p:txBody>
+          <a:bodyPr rtlCol="0" anchor="ctr"/>
+          <a:lstStyle/>
+          <a:p>
+            <a:pPr algn="ctr"/>
+          </a:p>
+        </p:txBody>
+      </p:sp>
+      <p:sp>
+        <p:nvSpPr>
+          <p:cNvPr id="16" name="Oval 15"/>
+          <p:cNvSpPr/>
+          <p:nvPr/>
+        </p:nvSpPr>
+        <p:spPr>
+          <a:xfrm>
+            <a:off x="2948400" y="435600"/>
+            <a:ext cx="36000" cy="36000"/>
+          </a:xfrm>
+          <a:prstGeom prst="ellipse">
+            <a:avLst/>
+          </a:prstGeom>
+          <a:solidFill>
+            <a:srgbClr val="26292D"/>
+          </a:solidFill>
+          <a:ln>
+            <a:noFill/>
+          </a:ln>
+        </p:spPr>
+        <p:txBody>
+          <a:bodyPr rtlCol="0" anchor="ctr"/>
+          <a:lstStyle/>
+          <a:p>
+            <a:pPr algn="ctr"/>
+          </a:p>
+        </p:txBody>
+      </p:sp>
+      <p:sp>
+        <p:nvSpPr>
+          <p:cNvPr id="17" name="Oval 16"/>
+          <p:cNvSpPr/>
+          <p:nvPr/>
+        </p:nvSpPr>
+        <p:spPr>
+          <a:xfrm>
+            <a:off x="2948400" y="536400"/>
+            <a:ext cx="36000" cy="36000"/>
+          </a:xfrm>
+          <a:prstGeom prst="ellipse">
+            <a:avLst/>
+          </a:prstGeom>
+          <a:solidFill>
+            <a:srgbClr val="00C2C0"/>
+          </a:solidFill>
+          <a:ln>
+            <a:noFill/>
+          </a:ln>
+        </p:spPr>
+        <p:txBody>
+          <a:bodyPr rtlCol="0" anchor="ctr"/>
+          <a:lstStyle/>
+          <a:p>
+            <a:pPr algn="ctr"/>
+          </a:p>
+        </p:txBody>
+      </p:sp>
+      <p:sp>
+        <p:nvSpPr>
+          <p:cNvPr id="18" name="Oval 17"/>
+          <p:cNvSpPr/>
+          <p:nvPr/>
+        </p:nvSpPr>
+        <p:spPr>
+          <a:xfrm>
+            <a:off x="3049200" y="234000"/>
+            <a:ext cx="36000" cy="36000"/>
+          </a:xfrm>
+          <a:prstGeom prst="ellipse">
+            <a:avLst/>
+          </a:prstGeom>
+          <a:solidFill>
+            <a:srgbClr val="26292D"/>
+          </a:solidFill>
+          <a:ln>
+            <a:noFill/>
+          </a:ln>
+        </p:spPr>
+        <p:txBody>
+          <a:bodyPr rtlCol="0" anchor="ctr"/>
+          <a:lstStyle/>
+          <a:p>
+            <a:pPr algn="ctr"/>
+          </a:p>
+        </p:txBody>
+      </p:sp>
+      <p:sp>
+        <p:nvSpPr>
+          <p:cNvPr id="19" name="Oval 18"/>
+          <p:cNvSpPr/>
+          <p:nvPr/>
+        </p:nvSpPr>
+        <p:spPr>
+          <a:xfrm>
+            <a:off x="3049200" y="334800"/>
+            <a:ext cx="36000" cy="36000"/>
+          </a:xfrm>
+          <a:prstGeom prst="ellipse">
+            <a:avLst/>
+          </a:prstGeom>
+          <a:solidFill>
+            <a:srgbClr val="26292D"/>
+          </a:solidFill>
+          <a:ln>
+            <a:noFill/>
+          </a:ln>
+        </p:spPr>
+        <p:txBody>
+          <a:bodyPr rtlCol="0" anchor="ctr"/>
+          <a:lstStyle/>
+          <a:p>
+            <a:pPr algn="ctr"/>
+          </a:p>
+        </p:txBody>
+      </p:sp>
+      <p:sp>
+        <p:nvSpPr>
+          <p:cNvPr id="20" name="Oval 19"/>
+          <p:cNvSpPr/>
+          <p:nvPr/>
+        </p:nvSpPr>
+        <p:spPr>
+          <a:xfrm>
+            <a:off x="3049200" y="435600"/>
+            <a:ext cx="36000" cy="36000"/>
+          </a:xfrm>
+          <a:prstGeom prst="ellipse">
+            <a:avLst/>
+          </a:prstGeom>
+          <a:solidFill>
+            <a:srgbClr val="00C2C0"/>
+          </a:solidFill>
+          <a:ln>
+            <a:noFill/>
+          </a:ln>
+        </p:spPr>
+        <p:txBody>
+          <a:bodyPr rtlCol="0" anchor="ctr"/>
+          <a:lstStyle/>
+          <a:p>
+            <a:pPr algn="ctr"/>
+          </a:p>
+        </p:txBody>
+      </p:sp>
+      <p:sp>
+        <p:nvSpPr>
+          <p:cNvPr id="21" name="Oval 20"/>
+          <p:cNvSpPr/>
+          <p:nvPr/>
+        </p:nvSpPr>
+        <p:spPr>
+          <a:xfrm>
+            <a:off x="3049200" y="536400"/>
+            <a:ext cx="36000" cy="36000"/>
+          </a:xfrm>
+          <a:prstGeom prst="ellipse">
+            <a:avLst/>
+          </a:prstGeom>
+          <a:solidFill>
+            <a:srgbClr val="26292D"/>
+          </a:solidFill>
+          <a:ln>
+            <a:noFill/>
+          </a:ln>
+        </p:spPr>
+        <p:txBody>
+          <a:bodyPr rtlCol="0" anchor="ctr"/>
+          <a:lstStyle/>
+          <a:p>
+            <a:pPr algn="ctr"/>
+          </a:p>
+        </p:txBody>
+      </p:sp>
+      <p:sp>
+        <p:nvSpPr>
+          <p:cNvPr id="22" name="텍스트"/>
           <p:cNvSpPr txBox="1"/>
           <p:nvPr/>
         </p:nvSpPr>
         <p:spPr>
           <a:xfrm>
-            <a:off x="216000" y="230400"/>
-            <a:ext cx="2160000" cy="313692"/>
+            <a:off x="252000" y="223200"/>
+            <a:ext cx="1440000" cy="133351"/>
           </a:xfrm>
           <a:prstGeom prst="rect">
             <a:avLst/>
@@ -3270,11 +3701,51 @@
           <a:p>
             <a:pPr algn="l">
               <a:lnSpc>
-                <a:spcPts val="2755"/>
+                <a:spcPts val="1015"/>
               </a:lnSpc>
             </a:pPr>
             <a:r>
-              <a:rPr sz="1900" b="1" spc="50">
+              <a:rPr sz="700" b="1" spc="200">
+                <a:solidFill>
+                  <a:srgbClr val="A3A9B5"/>
+                </a:solidFill>
+                <a:latin typeface="맑은 고딕"/>
+                <a:ea typeface="맑은 고딕"/>
+              </a:rPr>
+              <a:t>스튜디오 이름</a:t>
+            </a:r>
+          </a:p>
+        </p:txBody>
+      </p:sp>
+      <p:sp>
+        <p:nvSpPr>
+          <p:cNvPr id="23" name="텍스트"/>
+          <p:cNvSpPr txBox="1"/>
+          <p:nvPr/>
+        </p:nvSpPr>
+        <p:spPr>
+          <a:xfrm>
+            <a:off x="252000" y="770400"/>
+            <a:ext cx="2016000" cy="360000"/>
+          </a:xfrm>
+          <a:prstGeom prst="rect">
+            <a:avLst/>
+          </a:prstGeom>
+          <a:noFill/>
+        </p:spPr>
+        <p:txBody>
+          <a:bodyPr wrap="square" lIns="0" rIns="0" tIns="0" bIns="0" anchor="t">
+            <a:spAutoFit/>
+          </a:bodyPr>
+          <a:lstStyle/>
+          <a:p>
+            <a:pPr algn="l">
+              <a:lnSpc>
+                <a:spcPts val="3190"/>
+              </a:lnSpc>
+            </a:pPr>
+            <a:r>
+              <a:rPr sz="2200" b="1">
                 <a:solidFill>
                   <a:srgbClr val="FFFFFF"/>
                 </a:solidFill>
@@ -3288,14 +3759,14 @@
       </p:sp>
       <p:sp>
         <p:nvSpPr>
-          <p:cNvPr id="8" name="텍스트"/>
+          <p:cNvPr id="24" name="텍스트"/>
           <p:cNvSpPr txBox="1"/>
           <p:nvPr/>
         </p:nvSpPr>
         <p:spPr>
           <a:xfrm>
-            <a:off x="216000" y="525600"/>
-            <a:ext cx="2160000" cy="122400"/>
+            <a:off x="252000" y="1173600"/>
+            <a:ext cx="2016000" cy="171451"/>
           </a:xfrm>
           <a:prstGeom prst="rect">
             <a:avLst/>
@@ -3310,13 +3781,13 @@
           <a:p>
             <a:pPr algn="l">
               <a:lnSpc>
-                <a:spcPts val="1232"/>
+                <a:spcPts val="1305"/>
               </a:lnSpc>
             </a:pPr>
             <a:r>
-              <a:rPr sz="850" b="1">
+              <a:rPr sz="900" b="0">
                 <a:solidFill>
-                  <a:srgbClr val="96B4C9"/>
+                  <a:srgbClr val="A3A9B5"/>
                 </a:solidFill>
                 <a:latin typeface="맑은 고딕"/>
                 <a:ea typeface="맑은 고딕"/>
@@ -3328,14 +3799,14 @@
       </p:sp>
       <p:sp>
         <p:nvSpPr>
-          <p:cNvPr id="9" name="텍스트"/>
+          <p:cNvPr id="25" name="텍스트"/>
           <p:cNvSpPr txBox="1"/>
           <p:nvPr/>
         </p:nvSpPr>
         <p:spPr>
           <a:xfrm>
-            <a:off x="216000" y="770400"/>
-            <a:ext cx="2160000" cy="100800"/>
+            <a:off x="1620000" y="1339200"/>
+            <a:ext cx="1368000" cy="133351"/>
           </a:xfrm>
           <a:prstGeom prst="rect">
             <a:avLst/>
@@ -3348,87 +3819,7 @@
           </a:bodyPr>
           <a:lstStyle/>
           <a:p>
-            <a:pPr algn="l">
-              <a:lnSpc>
-                <a:spcPts val="1087"/>
-              </a:lnSpc>
-            </a:pPr>
-            <a:r>
-              <a:rPr sz="750" b="1" spc="150">
-                <a:solidFill>
-                  <a:srgbClr val="B4BEC6"/>
-                </a:solidFill>
-                <a:latin typeface="맑은 고딕"/>
-                <a:ea typeface="맑은 고딕"/>
-              </a:rPr>
-              <a:t>스튜디오 이름</a:t>
-            </a:r>
-          </a:p>
-        </p:txBody>
-      </p:sp>
-      <p:sp>
-        <p:nvSpPr>
-          <p:cNvPr id="10" name="텍스트"/>
-          <p:cNvSpPr txBox="1"/>
-          <p:nvPr/>
-        </p:nvSpPr>
-        <p:spPr>
-          <a:xfrm>
-            <a:off x="216000" y="1432800"/>
-            <a:ext cx="122400" cy="108000"/>
-          </a:xfrm>
-          <a:prstGeom prst="rect">
-            <a:avLst/>
-          </a:prstGeom>
-          <a:noFill/>
-        </p:spPr>
-        <p:txBody>
-          <a:bodyPr wrap="square" lIns="0" rIns="0" tIns="0" bIns="0" anchor="t">
-            <a:spAutoFit/>
-          </a:bodyPr>
-          <a:lstStyle/>
-          <a:p>
-            <a:pPr algn="l">
-              <a:lnSpc>
-                <a:spcPts val="1015"/>
-              </a:lnSpc>
-            </a:pPr>
-            <a:r>
-              <a:rPr sz="700" b="1">
-                <a:solidFill>
-                  <a:srgbClr val="FFFFFF"/>
-                </a:solidFill>
-                <a:latin typeface="맑은 고딕"/>
-                <a:ea typeface="맑은 고딕"/>
-              </a:rPr>
-              <a:t>T</a:t>
-            </a:r>
-          </a:p>
-        </p:txBody>
-      </p:sp>
-      <p:sp>
-        <p:nvSpPr>
-          <p:cNvPr id="11" name="텍스트"/>
-          <p:cNvSpPr txBox="1"/>
-          <p:nvPr/>
-        </p:nvSpPr>
-        <p:spPr>
-          <a:xfrm>
-            <a:off x="360000" y="1432800"/>
-            <a:ext cx="1368000" cy="108000"/>
-          </a:xfrm>
-          <a:prstGeom prst="rect">
-            <a:avLst/>
-          </a:prstGeom>
-          <a:noFill/>
-        </p:spPr>
-        <p:txBody>
-          <a:bodyPr wrap="square" lIns="0" rIns="0" tIns="0" bIns="0" anchor="t">
-            <a:spAutoFit/>
-          </a:bodyPr>
-          <a:lstStyle/>
-          <a:p>
-            <a:pPr algn="l">
+            <a:pPr algn="r">
               <a:lnSpc>
                 <a:spcPts val="1015"/>
               </a:lnSpc>
@@ -3448,14 +3839,14 @@
       </p:sp>
       <p:sp>
         <p:nvSpPr>
-          <p:cNvPr id="12" name="텍스트"/>
+          <p:cNvPr id="26" name="텍스트"/>
           <p:cNvSpPr txBox="1"/>
           <p:nvPr/>
         </p:nvSpPr>
         <p:spPr>
           <a:xfrm>
-            <a:off x="216000" y="1576800"/>
-            <a:ext cx="122400" cy="108000"/>
+            <a:off x="1620000" y="1476000"/>
+            <a:ext cx="1368000" cy="133351"/>
           </a:xfrm>
           <a:prstGeom prst="rect">
             <a:avLst/>
@@ -3468,47 +3859,7 @@
           </a:bodyPr>
           <a:lstStyle/>
           <a:p>
-            <a:pPr algn="l">
-              <a:lnSpc>
-                <a:spcPts val="1015"/>
-              </a:lnSpc>
-            </a:pPr>
-            <a:r>
-              <a:rPr sz="700" b="1">
-                <a:solidFill>
-                  <a:srgbClr val="FFFFFF"/>
-                </a:solidFill>
-                <a:latin typeface="맑은 고딕"/>
-                <a:ea typeface="맑은 고딕"/>
-              </a:rPr>
-              <a:t>E</a:t>
-            </a:r>
-          </a:p>
-        </p:txBody>
-      </p:sp>
-      <p:sp>
-        <p:nvSpPr>
-          <p:cNvPr id="13" name="텍스트"/>
-          <p:cNvSpPr txBox="1"/>
-          <p:nvPr/>
-        </p:nvSpPr>
-        <p:spPr>
-          <a:xfrm>
-            <a:off x="360000" y="1576800"/>
-            <a:ext cx="1368000" cy="108000"/>
-          </a:xfrm>
-          <a:prstGeom prst="rect">
-            <a:avLst/>
-          </a:prstGeom>
-          <a:noFill/>
-        </p:spPr>
-        <p:txBody>
-          <a:bodyPr wrap="square" lIns="0" rIns="0" tIns="0" bIns="0" anchor="t">
-            <a:spAutoFit/>
-          </a:bodyPr>
-          <a:lstStyle/>
-          <a:p>
-            <a:pPr algn="l">
+            <a:pPr algn="r">
               <a:lnSpc>
                 <a:spcPts val="1015"/>
               </a:lnSpc>
@@ -3528,14 +3879,14 @@
       </p:sp>
       <p:sp>
         <p:nvSpPr>
-          <p:cNvPr id="14" name="텍스트"/>
+          <p:cNvPr id="27" name="텍스트"/>
           <p:cNvSpPr txBox="1"/>
           <p:nvPr/>
         </p:nvSpPr>
         <p:spPr>
           <a:xfrm>
-            <a:off x="1800000" y="1432800"/>
-            <a:ext cx="122400" cy="108000"/>
+            <a:off x="1620000" y="1612800"/>
+            <a:ext cx="1368000" cy="133351"/>
           </a:xfrm>
           <a:prstGeom prst="rect">
             <a:avLst/>
@@ -3548,47 +3899,7 @@
           </a:bodyPr>
           <a:lstStyle/>
           <a:p>
-            <a:pPr algn="l">
-              <a:lnSpc>
-                <a:spcPts val="1015"/>
-              </a:lnSpc>
-            </a:pPr>
-            <a:r>
-              <a:rPr sz="700" b="1">
-                <a:solidFill>
-                  <a:srgbClr val="FFFFFF"/>
-                </a:solidFill>
-                <a:latin typeface="맑은 고딕"/>
-                <a:ea typeface="맑은 고딕"/>
-              </a:rPr>
-              <a:t>A</a:t>
-            </a:r>
-          </a:p>
-        </p:txBody>
-      </p:sp>
-      <p:sp>
-        <p:nvSpPr>
-          <p:cNvPr id="15" name="텍스트"/>
-          <p:cNvSpPr txBox="1"/>
-          <p:nvPr/>
-        </p:nvSpPr>
-        <p:spPr>
-          <a:xfrm>
-            <a:off x="1944000" y="1432800"/>
-            <a:ext cx="1188000" cy="216000"/>
-          </a:xfrm>
-          <a:prstGeom prst="rect">
-            <a:avLst/>
-          </a:prstGeom>
-          <a:noFill/>
-        </p:spPr>
-        <p:txBody>
-          <a:bodyPr wrap="square" lIns="0" rIns="0" tIns="0" bIns="0" anchor="t">
-            <a:spAutoFit/>
-          </a:bodyPr>
-          <a:lstStyle/>
-          <a:p>
-            <a:pPr algn="l">
+            <a:pPr algn="r">
               <a:lnSpc>
                 <a:spcPts val="1015"/>
               </a:lnSpc>
@@ -3620,7 +3931,7 @@
     <p:bg>
       <p:bgPr>
         <a:solidFill>
-          <a:srgbClr val="3B6482"/>
+          <a:srgbClr val="0E1116"/>
         </a:solidFill>
         <a:effectLst/>
       </p:bgPr>
@@ -3634,20 +3945,107 @@
       <p:grpSpPr/>
       <p:sp>
         <p:nvSpPr>
-          <p:cNvPr id="2" name="Rectangle 1"/>
+          <p:cNvPr id="2" name="Freeform 1"/>
           <p:cNvSpPr/>
           <p:nvPr/>
         </p:nvSpPr>
         <p:spPr>
           <a:xfrm>
             <a:off x="0" y="0"/>
-            <a:ext cx="273600" cy="1800000"/>
-          </a:xfrm>
-          <a:prstGeom prst="rect">
+            <a:ext cx="1080000" cy="1080000"/>
+          </a:xfrm>
+          <a:custGeom>
             <a:avLst/>
-          </a:prstGeom>
+            <a:gdLst/>
+            <a:ahLst/>
+            <a:cxnLst/>
+            <a:rect l="l" t="t" r="r" b="b"/>
+            <a:pathLst>
+              <a:path w="1080000" h="1080000">
+                <a:moveTo>
+                  <a:pt x="0" y="0"/>
+                </a:moveTo>
+                <a:lnTo>
+                  <a:pt x="1080000" y="0"/>
+                </a:lnTo>
+                <a:lnTo>
+                  <a:pt x="1077688" y="70635"/>
+                </a:lnTo>
+                <a:lnTo>
+                  <a:pt x="1070760" y="140968"/>
+                </a:lnTo>
+                <a:lnTo>
+                  <a:pt x="1059248" y="210698"/>
+                </a:lnTo>
+                <a:lnTo>
+                  <a:pt x="1043200" y="279525"/>
+                </a:lnTo>
+                <a:lnTo>
+                  <a:pt x="1022685" y="347155"/>
+                </a:lnTo>
+                <a:lnTo>
+                  <a:pt x="997790" y="413298"/>
+                </a:lnTo>
+                <a:lnTo>
+                  <a:pt x="968623" y="477672"/>
+                </a:lnTo>
+                <a:lnTo>
+                  <a:pt x="935307" y="540000"/>
+                </a:lnTo>
+                <a:lnTo>
+                  <a:pt x="897987" y="600016"/>
+                </a:lnTo>
+                <a:lnTo>
+                  <a:pt x="856822" y="657462"/>
+                </a:lnTo>
+                <a:lnTo>
+                  <a:pt x="811987" y="712093"/>
+                </a:lnTo>
+                <a:lnTo>
+                  <a:pt x="763675" y="763675"/>
+                </a:lnTo>
+                <a:lnTo>
+                  <a:pt x="712093" y="811987"/>
+                </a:lnTo>
+                <a:lnTo>
+                  <a:pt x="657462" y="856822"/>
+                </a:lnTo>
+                <a:lnTo>
+                  <a:pt x="600016" y="897987"/>
+                </a:lnTo>
+                <a:lnTo>
+                  <a:pt x="540000" y="935307"/>
+                </a:lnTo>
+                <a:lnTo>
+                  <a:pt x="477672" y="968623"/>
+                </a:lnTo>
+                <a:lnTo>
+                  <a:pt x="413298" y="997790"/>
+                </a:lnTo>
+                <a:lnTo>
+                  <a:pt x="347155" y="1022685"/>
+                </a:lnTo>
+                <a:lnTo>
+                  <a:pt x="279525" y="1043200"/>
+                </a:lnTo>
+                <a:lnTo>
+                  <a:pt x="210698" y="1059248"/>
+                </a:lnTo>
+                <a:lnTo>
+                  <a:pt x="140968" y="1070760"/>
+                </a:lnTo>
+                <a:lnTo>
+                  <a:pt x="70635" y="1077688"/>
+                </a:lnTo>
+                <a:lnTo>
+                  <a:pt x="0" y="1080000"/>
+                </a:lnTo>
+                <a:close/>
+              </a:path>
+            </a:pathLst>
+          </a:custGeom>
           <a:solidFill>
-            <a:srgbClr val="D3E3EE"/>
+            <a:srgbClr val="00C2C0"/>
           </a:solidFill>
           <a:ln>
             <a:noFill/>
@@ -3663,22 +4061,107 @@
       </p:sp>
       <p:sp>
         <p:nvSpPr>
-          <p:cNvPr id="3" name="Rounded Rectangle 2"/>
+          <p:cNvPr id="3" name="Freeform 2"/>
           <p:cNvSpPr/>
           <p:nvPr/>
         </p:nvSpPr>
         <p:spPr>
           <a:xfrm>
-            <a:off x="67104" y="205920"/>
-            <a:ext cx="139392" cy="95040"/>
-          </a:xfrm>
-          <a:prstGeom prst="roundRect">
-            <a:avLst>
-              <a:gd name="adj" fmla="val 16666"/>
-            </a:avLst>
-          </a:prstGeom>
+            <a:off x="0" y="0"/>
+            <a:ext cx="684000" cy="684000"/>
+          </a:xfrm>
+          <a:custGeom>
+            <a:avLst/>
+            <a:gdLst/>
+            <a:ahLst/>
+            <a:cxnLst/>
+            <a:rect l="l" t="t" r="r" b="b"/>
+            <a:pathLst>
+              <a:path w="684000" h="684000">
+                <a:moveTo>
+                  <a:pt x="0" y="0"/>
+                </a:moveTo>
+                <a:lnTo>
+                  <a:pt x="684000" y="0"/>
+                </a:lnTo>
+                <a:lnTo>
+                  <a:pt x="682536" y="44736"/>
+                </a:lnTo>
+                <a:lnTo>
+                  <a:pt x="678148" y="89280"/>
+                </a:lnTo>
+                <a:lnTo>
+                  <a:pt x="670857" y="133442"/>
+                </a:lnTo>
+                <a:lnTo>
+                  <a:pt x="660693" y="177032"/>
+                </a:lnTo>
+                <a:lnTo>
+                  <a:pt x="647700" y="219865"/>
+                </a:lnTo>
+                <a:lnTo>
+                  <a:pt x="631934" y="261755"/>
+                </a:lnTo>
+                <a:lnTo>
+                  <a:pt x="613461" y="302525"/>
+                </a:lnTo>
+                <a:lnTo>
+                  <a:pt x="592361" y="342000"/>
+                </a:lnTo>
+                <a:lnTo>
+                  <a:pt x="568725" y="380010"/>
+                </a:lnTo>
+                <a:lnTo>
+                  <a:pt x="542654" y="416393"/>
+                </a:lnTo>
+                <a:lnTo>
+                  <a:pt x="514258" y="450993"/>
+                </a:lnTo>
+                <a:lnTo>
+                  <a:pt x="483661" y="483661"/>
+                </a:lnTo>
+                <a:lnTo>
+                  <a:pt x="450993" y="514258"/>
+                </a:lnTo>
+                <a:lnTo>
+                  <a:pt x="416393" y="542654"/>
+                </a:lnTo>
+                <a:lnTo>
+                  <a:pt x="380010" y="568725"/>
+                </a:lnTo>
+                <a:lnTo>
+                  <a:pt x="342000" y="592361"/>
+                </a:lnTo>
+                <a:lnTo>
+                  <a:pt x="302525" y="613461"/>
+                </a:lnTo>
+                <a:lnTo>
+                  <a:pt x="261755" y="631934"/>
+                </a:lnTo>
+                <a:lnTo>
+                  <a:pt x="219865" y="647700"/>
+                </a:lnTo>
+                <a:lnTo>
+                  <a:pt x="177032" y="660693"/>
+                </a:lnTo>
+                <a:lnTo>
+                  <a:pt x="133442" y="670857"/>
+                </a:lnTo>
+                <a:lnTo>
+                  <a:pt x="89280" y="678148"/>
+                </a:lnTo>
+                <a:lnTo>
+                  <a:pt x="44736" y="682536"/>
+                </a:lnTo>
+                <a:lnTo>
+                  <a:pt x="0" y="684000"/>
+                </a:lnTo>
+                <a:close/>
+              </a:path>
+            </a:pathLst>
+          </a:custGeom>
           <a:solidFill>
-            <a:srgbClr val="595959"/>
+            <a:srgbClr val="26292D"/>
           </a:solidFill>
           <a:ln>
             <a:noFill/>
@@ -3694,103 +4177,14 @@
       </p:sp>
       <p:sp>
         <p:nvSpPr>
-          <p:cNvPr id="4" name="Rounded Rectangle 3"/>
-          <p:cNvSpPr/>
-          <p:nvPr/>
-        </p:nvSpPr>
-        <p:spPr>
-          <a:xfrm>
-            <a:off x="111456" y="183744"/>
-            <a:ext cx="50688" cy="25344"/>
-          </a:xfrm>
-          <a:prstGeom prst="roundRect">
-            <a:avLst>
-              <a:gd name="adj" fmla="val 25000"/>
-            </a:avLst>
-          </a:prstGeom>
-          <a:solidFill>
-            <a:srgbClr val="595959"/>
-          </a:solidFill>
-          <a:ln>
-            <a:noFill/>
-          </a:ln>
-        </p:spPr>
-        <p:txBody>
-          <a:bodyPr rtlCol="0" anchor="ctr"/>
-          <a:lstStyle/>
-          <a:p>
-            <a:pPr algn="ctr"/>
-          </a:p>
-        </p:txBody>
-      </p:sp>
-      <p:sp>
-        <p:nvSpPr>
-          <p:cNvPr id="5" name="Oval 4"/>
-          <p:cNvSpPr/>
-          <p:nvPr/>
-        </p:nvSpPr>
-        <p:spPr>
-          <a:xfrm>
-            <a:off x="103536" y="220176"/>
-            <a:ext cx="66528" cy="66528"/>
-          </a:xfrm>
-          <a:prstGeom prst="ellipse">
-            <a:avLst/>
-          </a:prstGeom>
-          <a:solidFill>
-            <a:srgbClr val="D6D6D6"/>
-          </a:solidFill>
-          <a:ln>
-            <a:noFill/>
-          </a:ln>
-        </p:spPr>
-        <p:txBody>
-          <a:bodyPr rtlCol="0" anchor="ctr"/>
-          <a:lstStyle/>
-          <a:p>
-            <a:pPr algn="ctr"/>
-          </a:p>
-        </p:txBody>
-      </p:sp>
-      <p:sp>
-        <p:nvSpPr>
-          <p:cNvPr id="6" name="Oval 5"/>
-          <p:cNvSpPr/>
-          <p:nvPr/>
-        </p:nvSpPr>
-        <p:spPr>
-          <a:xfrm>
-            <a:off x="119376" y="236016"/>
-            <a:ext cx="34848" cy="34848"/>
-          </a:xfrm>
-          <a:prstGeom prst="ellipse">
-            <a:avLst/>
-          </a:prstGeom>
-          <a:solidFill>
-            <a:srgbClr val="595959"/>
-          </a:solidFill>
-          <a:ln>
-            <a:noFill/>
-          </a:ln>
-        </p:spPr>
-        <p:txBody>
-          <a:bodyPr rtlCol="0" anchor="ctr"/>
-          <a:lstStyle/>
-          <a:p>
-            <a:pPr algn="ctr"/>
-          </a:p>
-        </p:txBody>
-      </p:sp>
-      <p:sp>
-        <p:nvSpPr>
-          <p:cNvPr id="7" name="텍스트"/>
+          <p:cNvPr id="4" name="텍스트"/>
           <p:cNvSpPr txBox="1"/>
           <p:nvPr/>
         </p:nvSpPr>
         <p:spPr>
           <a:xfrm>
-            <a:off x="504000" y="396000"/>
-            <a:ext cx="1800000" cy="720000"/>
+            <a:off x="1188000" y="1044000"/>
+            <a:ext cx="1800000" cy="432000"/>
           </a:xfrm>
           <a:prstGeom prst="rect">
             <a:avLst/>
@@ -3798,40 +4192,40 @@
           <a:noFill/>
         </p:spPr>
         <p:txBody>
-          <a:bodyPr wrap="square" lIns="0" rIns="0" tIns="0" bIns="0" anchor="ctr">
+          <a:bodyPr wrap="square" lIns="0" rIns="0" tIns="0" bIns="0" anchor="t">
             <a:spAutoFit/>
           </a:bodyPr>
           <a:lstStyle/>
           <a:p>
-            <a:pPr algn="l">
+            <a:pPr algn="r">
               <a:lnSpc>
-                <a:spcPts val="1667"/>
+                <a:spcPts val="1739"/>
               </a:lnSpc>
             </a:pPr>
             <a:r>
-              <a:rPr sz="1150" b="1">
+              <a:rPr sz="1200" b="1">
                 <a:solidFill>
                   <a:srgbClr val="FFFFFF"/>
                 </a:solidFill>
-                <a:latin typeface="바탕"/>
-                <a:ea typeface="바탕"/>
+                <a:latin typeface="맑은 고딕"/>
+                <a:ea typeface="맑은 고딕"/>
               </a:rPr>
               <a:t>자유롭게,</a:t>
             </a:r>
           </a:p>
           <a:p>
-            <a:pPr algn="l">
+            <a:pPr algn="r">
               <a:lnSpc>
-                <a:spcPts val="1667"/>
+                <a:spcPts val="1739"/>
               </a:lnSpc>
             </a:pPr>
             <a:r>
-              <a:rPr sz="1150" b="1">
+              <a:rPr sz="1200" b="1">
                 <a:solidFill>
                   <a:srgbClr val="FFFFFF"/>
                 </a:solidFill>
-                <a:latin typeface="바탕"/>
-                <a:ea typeface="바탕"/>
+                <a:latin typeface="맑은 고딕"/>
+                <a:ea typeface="맑은 고딕"/>
               </a:rPr>
               <a:t>그러나 책임 있게</a:t>
             </a:r>
@@ -3840,14 +4234,14 @@
       </p:sp>
       <p:sp>
         <p:nvSpPr>
-          <p:cNvPr id="8" name="텍스트"/>
+          <p:cNvPr id="5" name="텍스트"/>
           <p:cNvSpPr txBox="1"/>
           <p:nvPr/>
         </p:nvSpPr>
         <p:spPr>
           <a:xfrm>
-            <a:off x="504000" y="1260000"/>
-            <a:ext cx="1728000" cy="108000"/>
+            <a:off x="1188000" y="1526400"/>
+            <a:ext cx="1800000" cy="123826"/>
           </a:xfrm>
           <a:prstGeom prst="rect">
             <a:avLst/>
@@ -3860,90 +4254,20 @@
           </a:bodyPr>
           <a:lstStyle/>
           <a:p>
-            <a:pPr algn="l">
+            <a:pPr algn="r">
               <a:lnSpc>
-                <a:spcPts val="1087"/>
+                <a:spcPts val="942"/>
               </a:lnSpc>
             </a:pPr>
             <a:r>
-              <a:rPr sz="750" b="1" spc="200">
+              <a:rPr sz="650" b="1" spc="200">
                 <a:solidFill>
-                  <a:srgbClr val="D2DCE2"/>
+                  <a:srgbClr val="A3A9B5"/>
                 </a:solidFill>
                 <a:latin typeface="맑은 고딕"/>
                 <a:ea typeface="맑은 고딕"/>
               </a:rPr>
               <a:t>스튜디오 이름</a:t>
-            </a:r>
-          </a:p>
-        </p:txBody>
-      </p:sp>
-      <p:sp>
-        <p:nvSpPr>
-          <p:cNvPr id="9" name="Rectangle 8"/>
-          <p:cNvSpPr/>
-          <p:nvPr/>
-        </p:nvSpPr>
-        <p:spPr>
-          <a:xfrm>
-            <a:off x="2520000" y="216000"/>
-            <a:ext cx="468000" cy="468000"/>
-          </a:xfrm>
-          <a:prstGeom prst="rect">
-            <a:avLst/>
-          </a:prstGeom>
-          <a:noFill/>
-          <a:ln w="9000">
-            <a:solidFill>
-              <a:srgbClr val="D3E3EE"/>
-            </a:solidFill>
-            <a:prstDash val="dash"/>
-          </a:ln>
-        </p:spPr>
-        <p:txBody>
-          <a:bodyPr rtlCol="0" anchor="ctr"/>
-          <a:lstStyle/>
-          <a:p>
-            <a:pPr algn="ctr"/>
-          </a:p>
-        </p:txBody>
-      </p:sp>
-      <p:sp>
-        <p:nvSpPr>
-          <p:cNvPr id="10" name="텍스트"/>
-          <p:cNvSpPr txBox="1"/>
-          <p:nvPr/>
-        </p:nvSpPr>
-        <p:spPr>
-          <a:xfrm>
-            <a:off x="2520000" y="216000"/>
-            <a:ext cx="468000" cy="468000"/>
-          </a:xfrm>
-          <a:prstGeom prst="rect">
-            <a:avLst/>
-          </a:prstGeom>
-          <a:noFill/>
-        </p:spPr>
-        <p:txBody>
-          <a:bodyPr wrap="square" lIns="0" rIns="0" tIns="0" bIns="0" anchor="ctr">
-            <a:spAutoFit/>
-          </a:bodyPr>
-          <a:lstStyle/>
-          <a:p>
-            <a:pPr algn="ctr">
-              <a:lnSpc>
-                <a:spcPts val="1305"/>
-              </a:lnSpc>
-            </a:pPr>
-            <a:r>
-              <a:rPr sz="900" b="1">
-                <a:solidFill>
-                  <a:srgbClr val="D2DCE2"/>
-                </a:solidFill>
-                <a:latin typeface="맑은 고딕"/>
-                <a:ea typeface="맑은 고딕"/>
-              </a:rPr>
-              <a:t>QR</a:t>
             </a:r>
           </a:p>
         </p:txBody>

--- a/public/fun/cards/creative/creative-36.pptx
+++ b/public/fun/cards/creative/creative-36.pptx
@@ -3099,16 +3099,45 @@
       <p:grpSpPr/>
       <p:sp>
         <p:nvSpPr>
-          <p:cNvPr id="2" name="Oval 1"/>
+          <p:cNvPr id="2" name="Rectangle 1"/>
           <p:cNvSpPr/>
           <p:nvPr/>
         </p:nvSpPr>
         <p:spPr>
           <a:xfrm>
-            <a:off x="2646000" y="234000"/>
-            <a:ext cx="36000" cy="36000"/>
-          </a:xfrm>
-          <a:prstGeom prst="ellipse">
+            <a:off x="0" y="1296000"/>
+            <a:ext cx="3240000" cy="504000"/>
+          </a:xfrm>
+          <a:prstGeom prst="rect">
+            <a:avLst/>
+          </a:prstGeom>
+          <a:solidFill>
+            <a:srgbClr val="26292D"/>
+          </a:solidFill>
+          <a:ln>
+            <a:noFill/>
+          </a:ln>
+        </p:spPr>
+        <p:txBody>
+          <a:bodyPr rtlCol="0" anchor="ctr"/>
+          <a:lstStyle/>
+          <a:p>
+            <a:pPr algn="ctr"/>
+          </a:p>
+        </p:txBody>
+      </p:sp>
+      <p:sp>
+        <p:nvSpPr>
+          <p:cNvPr id="3" name="Rectangle 2"/>
+          <p:cNvSpPr/>
+          <p:nvPr/>
+        </p:nvSpPr>
+        <p:spPr>
+          <a:xfrm>
+            <a:off x="0" y="1296000"/>
+            <a:ext cx="3240000" cy="14400"/>
+          </a:xfrm>
+          <a:prstGeom prst="rect">
             <a:avLst/>
           </a:prstGeom>
           <a:solidFill>
@@ -3128,565 +3157,14 @@
       </p:sp>
       <p:sp>
         <p:nvSpPr>
-          <p:cNvPr id="3" name="Oval 2"/>
-          <p:cNvSpPr/>
-          <p:nvPr/>
-        </p:nvSpPr>
-        <p:spPr>
-          <a:xfrm>
-            <a:off x="2646000" y="334800"/>
-            <a:ext cx="36000" cy="36000"/>
-          </a:xfrm>
-          <a:prstGeom prst="ellipse">
-            <a:avLst/>
-          </a:prstGeom>
-          <a:solidFill>
-            <a:srgbClr val="26292D"/>
-          </a:solidFill>
-          <a:ln>
-            <a:noFill/>
-          </a:ln>
-        </p:spPr>
-        <p:txBody>
-          <a:bodyPr rtlCol="0" anchor="ctr"/>
-          <a:lstStyle/>
-          <a:p>
-            <a:pPr algn="ctr"/>
-          </a:p>
-        </p:txBody>
-      </p:sp>
-      <p:sp>
-        <p:nvSpPr>
-          <p:cNvPr id="4" name="Oval 3"/>
-          <p:cNvSpPr/>
-          <p:nvPr/>
-        </p:nvSpPr>
-        <p:spPr>
-          <a:xfrm>
-            <a:off x="2646000" y="435600"/>
-            <a:ext cx="36000" cy="36000"/>
-          </a:xfrm>
-          <a:prstGeom prst="ellipse">
-            <a:avLst/>
-          </a:prstGeom>
-          <a:solidFill>
-            <a:srgbClr val="26292D"/>
-          </a:solidFill>
-          <a:ln>
-            <a:noFill/>
-          </a:ln>
-        </p:spPr>
-        <p:txBody>
-          <a:bodyPr rtlCol="0" anchor="ctr"/>
-          <a:lstStyle/>
-          <a:p>
-            <a:pPr algn="ctr"/>
-          </a:p>
-        </p:txBody>
-      </p:sp>
-      <p:sp>
-        <p:nvSpPr>
-          <p:cNvPr id="5" name="Oval 4"/>
-          <p:cNvSpPr/>
-          <p:nvPr/>
-        </p:nvSpPr>
-        <p:spPr>
-          <a:xfrm>
-            <a:off x="2646000" y="536400"/>
-            <a:ext cx="36000" cy="36000"/>
-          </a:xfrm>
-          <a:prstGeom prst="ellipse">
-            <a:avLst/>
-          </a:prstGeom>
-          <a:solidFill>
-            <a:srgbClr val="00C2C0"/>
-          </a:solidFill>
-          <a:ln>
-            <a:noFill/>
-          </a:ln>
-        </p:spPr>
-        <p:txBody>
-          <a:bodyPr rtlCol="0" anchor="ctr"/>
-          <a:lstStyle/>
-          <a:p>
-            <a:pPr algn="ctr"/>
-          </a:p>
-        </p:txBody>
-      </p:sp>
-      <p:sp>
-        <p:nvSpPr>
-          <p:cNvPr id="6" name="Oval 5"/>
-          <p:cNvSpPr/>
-          <p:nvPr/>
-        </p:nvSpPr>
-        <p:spPr>
-          <a:xfrm>
-            <a:off x="2746800" y="234000"/>
-            <a:ext cx="36000" cy="36000"/>
-          </a:xfrm>
-          <a:prstGeom prst="ellipse">
-            <a:avLst/>
-          </a:prstGeom>
-          <a:solidFill>
-            <a:srgbClr val="26292D"/>
-          </a:solidFill>
-          <a:ln>
-            <a:noFill/>
-          </a:ln>
-        </p:spPr>
-        <p:txBody>
-          <a:bodyPr rtlCol="0" anchor="ctr"/>
-          <a:lstStyle/>
-          <a:p>
-            <a:pPr algn="ctr"/>
-          </a:p>
-        </p:txBody>
-      </p:sp>
-      <p:sp>
-        <p:nvSpPr>
-          <p:cNvPr id="7" name="Oval 6"/>
-          <p:cNvSpPr/>
-          <p:nvPr/>
-        </p:nvSpPr>
-        <p:spPr>
-          <a:xfrm>
-            <a:off x="2746800" y="334800"/>
-            <a:ext cx="36000" cy="36000"/>
-          </a:xfrm>
-          <a:prstGeom prst="ellipse">
-            <a:avLst/>
-          </a:prstGeom>
-          <a:solidFill>
-            <a:srgbClr val="26292D"/>
-          </a:solidFill>
-          <a:ln>
-            <a:noFill/>
-          </a:ln>
-        </p:spPr>
-        <p:txBody>
-          <a:bodyPr rtlCol="0" anchor="ctr"/>
-          <a:lstStyle/>
-          <a:p>
-            <a:pPr algn="ctr"/>
-          </a:p>
-        </p:txBody>
-      </p:sp>
-      <p:sp>
-        <p:nvSpPr>
-          <p:cNvPr id="8" name="Oval 7"/>
-          <p:cNvSpPr/>
-          <p:nvPr/>
-        </p:nvSpPr>
-        <p:spPr>
-          <a:xfrm>
-            <a:off x="2746800" y="435600"/>
-            <a:ext cx="36000" cy="36000"/>
-          </a:xfrm>
-          <a:prstGeom prst="ellipse">
-            <a:avLst/>
-          </a:prstGeom>
-          <a:solidFill>
-            <a:srgbClr val="00C2C0"/>
-          </a:solidFill>
-          <a:ln>
-            <a:noFill/>
-          </a:ln>
-        </p:spPr>
-        <p:txBody>
-          <a:bodyPr rtlCol="0" anchor="ctr"/>
-          <a:lstStyle/>
-          <a:p>
-            <a:pPr algn="ctr"/>
-          </a:p>
-        </p:txBody>
-      </p:sp>
-      <p:sp>
-        <p:nvSpPr>
-          <p:cNvPr id="9" name="Oval 8"/>
-          <p:cNvSpPr/>
-          <p:nvPr/>
-        </p:nvSpPr>
-        <p:spPr>
-          <a:xfrm>
-            <a:off x="2746800" y="536400"/>
-            <a:ext cx="36000" cy="36000"/>
-          </a:xfrm>
-          <a:prstGeom prst="ellipse">
-            <a:avLst/>
-          </a:prstGeom>
-          <a:solidFill>
-            <a:srgbClr val="26292D"/>
-          </a:solidFill>
-          <a:ln>
-            <a:noFill/>
-          </a:ln>
-        </p:spPr>
-        <p:txBody>
-          <a:bodyPr rtlCol="0" anchor="ctr"/>
-          <a:lstStyle/>
-          <a:p>
-            <a:pPr algn="ctr"/>
-          </a:p>
-        </p:txBody>
-      </p:sp>
-      <p:sp>
-        <p:nvSpPr>
-          <p:cNvPr id="10" name="Oval 9"/>
-          <p:cNvSpPr/>
-          <p:nvPr/>
-        </p:nvSpPr>
-        <p:spPr>
-          <a:xfrm>
-            <a:off x="2847600" y="234000"/>
-            <a:ext cx="36000" cy="36000"/>
-          </a:xfrm>
-          <a:prstGeom prst="ellipse">
-            <a:avLst/>
-          </a:prstGeom>
-          <a:solidFill>
-            <a:srgbClr val="26292D"/>
-          </a:solidFill>
-          <a:ln>
-            <a:noFill/>
-          </a:ln>
-        </p:spPr>
-        <p:txBody>
-          <a:bodyPr rtlCol="0" anchor="ctr"/>
-          <a:lstStyle/>
-          <a:p>
-            <a:pPr algn="ctr"/>
-          </a:p>
-        </p:txBody>
-      </p:sp>
-      <p:sp>
-        <p:nvSpPr>
-          <p:cNvPr id="11" name="Oval 10"/>
-          <p:cNvSpPr/>
-          <p:nvPr/>
-        </p:nvSpPr>
-        <p:spPr>
-          <a:xfrm>
-            <a:off x="2847600" y="334800"/>
-            <a:ext cx="36000" cy="36000"/>
-          </a:xfrm>
-          <a:prstGeom prst="ellipse">
-            <a:avLst/>
-          </a:prstGeom>
-          <a:solidFill>
-            <a:srgbClr val="00C2C0"/>
-          </a:solidFill>
-          <a:ln>
-            <a:noFill/>
-          </a:ln>
-        </p:spPr>
-        <p:txBody>
-          <a:bodyPr rtlCol="0" anchor="ctr"/>
-          <a:lstStyle/>
-          <a:p>
-            <a:pPr algn="ctr"/>
-          </a:p>
-        </p:txBody>
-      </p:sp>
-      <p:sp>
-        <p:nvSpPr>
-          <p:cNvPr id="12" name="Oval 11"/>
-          <p:cNvSpPr/>
-          <p:nvPr/>
-        </p:nvSpPr>
-        <p:spPr>
-          <a:xfrm>
-            <a:off x="2847600" y="435600"/>
-            <a:ext cx="36000" cy="36000"/>
-          </a:xfrm>
-          <a:prstGeom prst="ellipse">
-            <a:avLst/>
-          </a:prstGeom>
-          <a:solidFill>
-            <a:srgbClr val="26292D"/>
-          </a:solidFill>
-          <a:ln>
-            <a:noFill/>
-          </a:ln>
-        </p:spPr>
-        <p:txBody>
-          <a:bodyPr rtlCol="0" anchor="ctr"/>
-          <a:lstStyle/>
-          <a:p>
-            <a:pPr algn="ctr"/>
-          </a:p>
-        </p:txBody>
-      </p:sp>
-      <p:sp>
-        <p:nvSpPr>
-          <p:cNvPr id="13" name="Oval 12"/>
-          <p:cNvSpPr/>
-          <p:nvPr/>
-        </p:nvSpPr>
-        <p:spPr>
-          <a:xfrm>
-            <a:off x="2847600" y="536400"/>
-            <a:ext cx="36000" cy="36000"/>
-          </a:xfrm>
-          <a:prstGeom prst="ellipse">
-            <a:avLst/>
-          </a:prstGeom>
-          <a:solidFill>
-            <a:srgbClr val="26292D"/>
-          </a:solidFill>
-          <a:ln>
-            <a:noFill/>
-          </a:ln>
-        </p:spPr>
-        <p:txBody>
-          <a:bodyPr rtlCol="0" anchor="ctr"/>
-          <a:lstStyle/>
-          <a:p>
-            <a:pPr algn="ctr"/>
-          </a:p>
-        </p:txBody>
-      </p:sp>
-      <p:sp>
-        <p:nvSpPr>
-          <p:cNvPr id="14" name="Oval 13"/>
-          <p:cNvSpPr/>
-          <p:nvPr/>
-        </p:nvSpPr>
-        <p:spPr>
-          <a:xfrm>
-            <a:off x="2948400" y="234000"/>
-            <a:ext cx="36000" cy="36000"/>
-          </a:xfrm>
-          <a:prstGeom prst="ellipse">
-            <a:avLst/>
-          </a:prstGeom>
-          <a:solidFill>
-            <a:srgbClr val="00C2C0"/>
-          </a:solidFill>
-          <a:ln>
-            <a:noFill/>
-          </a:ln>
-        </p:spPr>
-        <p:txBody>
-          <a:bodyPr rtlCol="0" anchor="ctr"/>
-          <a:lstStyle/>
-          <a:p>
-            <a:pPr algn="ctr"/>
-          </a:p>
-        </p:txBody>
-      </p:sp>
-      <p:sp>
-        <p:nvSpPr>
-          <p:cNvPr id="15" name="Oval 14"/>
-          <p:cNvSpPr/>
-          <p:nvPr/>
-        </p:nvSpPr>
-        <p:spPr>
-          <a:xfrm>
-            <a:off x="2948400" y="334800"/>
-            <a:ext cx="36000" cy="36000"/>
-          </a:xfrm>
-          <a:prstGeom prst="ellipse">
-            <a:avLst/>
-          </a:prstGeom>
-          <a:solidFill>
-            <a:srgbClr val="26292D"/>
-          </a:solidFill>
-          <a:ln>
-            <a:noFill/>
-          </a:ln>
-        </p:spPr>
-        <p:txBody>
-          <a:bodyPr rtlCol="0" anchor="ctr"/>
-          <a:lstStyle/>
-          <a:p>
-            <a:pPr algn="ctr"/>
-          </a:p>
-        </p:txBody>
-      </p:sp>
-      <p:sp>
-        <p:nvSpPr>
-          <p:cNvPr id="16" name="Oval 15"/>
-          <p:cNvSpPr/>
-          <p:nvPr/>
-        </p:nvSpPr>
-        <p:spPr>
-          <a:xfrm>
-            <a:off x="2948400" y="435600"/>
-            <a:ext cx="36000" cy="36000"/>
-          </a:xfrm>
-          <a:prstGeom prst="ellipse">
-            <a:avLst/>
-          </a:prstGeom>
-          <a:solidFill>
-            <a:srgbClr val="26292D"/>
-          </a:solidFill>
-          <a:ln>
-            <a:noFill/>
-          </a:ln>
-        </p:spPr>
-        <p:txBody>
-          <a:bodyPr rtlCol="0" anchor="ctr"/>
-          <a:lstStyle/>
-          <a:p>
-            <a:pPr algn="ctr"/>
-          </a:p>
-        </p:txBody>
-      </p:sp>
-      <p:sp>
-        <p:nvSpPr>
-          <p:cNvPr id="17" name="Oval 16"/>
-          <p:cNvSpPr/>
-          <p:nvPr/>
-        </p:nvSpPr>
-        <p:spPr>
-          <a:xfrm>
-            <a:off x="2948400" y="536400"/>
-            <a:ext cx="36000" cy="36000"/>
-          </a:xfrm>
-          <a:prstGeom prst="ellipse">
-            <a:avLst/>
-          </a:prstGeom>
-          <a:solidFill>
-            <a:srgbClr val="00C2C0"/>
-          </a:solidFill>
-          <a:ln>
-            <a:noFill/>
-          </a:ln>
-        </p:spPr>
-        <p:txBody>
-          <a:bodyPr rtlCol="0" anchor="ctr"/>
-          <a:lstStyle/>
-          <a:p>
-            <a:pPr algn="ctr"/>
-          </a:p>
-        </p:txBody>
-      </p:sp>
-      <p:sp>
-        <p:nvSpPr>
-          <p:cNvPr id="18" name="Oval 17"/>
-          <p:cNvSpPr/>
-          <p:nvPr/>
-        </p:nvSpPr>
-        <p:spPr>
-          <a:xfrm>
-            <a:off x="3049200" y="234000"/>
-            <a:ext cx="36000" cy="36000"/>
-          </a:xfrm>
-          <a:prstGeom prst="ellipse">
-            <a:avLst/>
-          </a:prstGeom>
-          <a:solidFill>
-            <a:srgbClr val="26292D"/>
-          </a:solidFill>
-          <a:ln>
-            <a:noFill/>
-          </a:ln>
-        </p:spPr>
-        <p:txBody>
-          <a:bodyPr rtlCol="0" anchor="ctr"/>
-          <a:lstStyle/>
-          <a:p>
-            <a:pPr algn="ctr"/>
-          </a:p>
-        </p:txBody>
-      </p:sp>
-      <p:sp>
-        <p:nvSpPr>
-          <p:cNvPr id="19" name="Oval 18"/>
-          <p:cNvSpPr/>
-          <p:nvPr/>
-        </p:nvSpPr>
-        <p:spPr>
-          <a:xfrm>
-            <a:off x="3049200" y="334800"/>
-            <a:ext cx="36000" cy="36000"/>
-          </a:xfrm>
-          <a:prstGeom prst="ellipse">
-            <a:avLst/>
-          </a:prstGeom>
-          <a:solidFill>
-            <a:srgbClr val="26292D"/>
-          </a:solidFill>
-          <a:ln>
-            <a:noFill/>
-          </a:ln>
-        </p:spPr>
-        <p:txBody>
-          <a:bodyPr rtlCol="0" anchor="ctr"/>
-          <a:lstStyle/>
-          <a:p>
-            <a:pPr algn="ctr"/>
-          </a:p>
-        </p:txBody>
-      </p:sp>
-      <p:sp>
-        <p:nvSpPr>
-          <p:cNvPr id="20" name="Oval 19"/>
-          <p:cNvSpPr/>
-          <p:nvPr/>
-        </p:nvSpPr>
-        <p:spPr>
-          <a:xfrm>
-            <a:off x="3049200" y="435600"/>
-            <a:ext cx="36000" cy="36000"/>
-          </a:xfrm>
-          <a:prstGeom prst="ellipse">
-            <a:avLst/>
-          </a:prstGeom>
-          <a:solidFill>
-            <a:srgbClr val="00C2C0"/>
-          </a:solidFill>
-          <a:ln>
-            <a:noFill/>
-          </a:ln>
-        </p:spPr>
-        <p:txBody>
-          <a:bodyPr rtlCol="0" anchor="ctr"/>
-          <a:lstStyle/>
-          <a:p>
-            <a:pPr algn="ctr"/>
-          </a:p>
-        </p:txBody>
-      </p:sp>
-      <p:sp>
-        <p:nvSpPr>
-          <p:cNvPr id="21" name="Oval 20"/>
-          <p:cNvSpPr/>
-          <p:nvPr/>
-        </p:nvSpPr>
-        <p:spPr>
-          <a:xfrm>
-            <a:off x="3049200" y="536400"/>
-            <a:ext cx="36000" cy="36000"/>
-          </a:xfrm>
-          <a:prstGeom prst="ellipse">
-            <a:avLst/>
-          </a:prstGeom>
-          <a:solidFill>
-            <a:srgbClr val="26292D"/>
-          </a:solidFill>
-          <a:ln>
-            <a:noFill/>
-          </a:ln>
-        </p:spPr>
-        <p:txBody>
-          <a:bodyPr rtlCol="0" anchor="ctr"/>
-          <a:lstStyle/>
-          <a:p>
-            <a:pPr algn="ctr"/>
-          </a:p>
-        </p:txBody>
-      </p:sp>
-      <p:sp>
-        <p:nvSpPr>
-          <p:cNvPr id="22" name="텍스트"/>
+          <p:cNvPr id="4" name="텍스트"/>
           <p:cNvSpPr txBox="1"/>
           <p:nvPr/>
         </p:nvSpPr>
         <p:spPr>
           <a:xfrm>
-            <a:off x="252000" y="223200"/>
-            <a:ext cx="1440000" cy="133351"/>
+            <a:off x="252000" y="252000"/>
+            <a:ext cx="1512000" cy="123826"/>
           </a:xfrm>
           <a:prstGeom prst="rect">
             <a:avLst/>
@@ -3701,11 +3179,11 @@
           <a:p>
             <a:pPr algn="l">
               <a:lnSpc>
-                <a:spcPts val="1015"/>
+                <a:spcPts val="942"/>
               </a:lnSpc>
             </a:pPr>
             <a:r>
-              <a:rPr sz="700" b="1" spc="200">
+              <a:rPr sz="650" b="1" spc="220">
                 <a:solidFill>
                   <a:srgbClr val="A3A9B5"/>
                 </a:solidFill>
@@ -3719,14 +3197,14 @@
       </p:sp>
       <p:sp>
         <p:nvSpPr>
-          <p:cNvPr id="23" name="텍스트"/>
+          <p:cNvPr id="5" name="텍스트"/>
           <p:cNvSpPr txBox="1"/>
           <p:nvPr/>
         </p:nvSpPr>
         <p:spPr>
           <a:xfrm>
-            <a:off x="252000" y="770400"/>
-            <a:ext cx="2016000" cy="360000"/>
+            <a:off x="252000" y="576000"/>
+            <a:ext cx="1800000" cy="237600"/>
           </a:xfrm>
           <a:prstGeom prst="rect">
             <a:avLst/>
@@ -3741,11 +3219,11 @@
           <a:p>
             <a:pPr algn="l">
               <a:lnSpc>
-                <a:spcPts val="3190"/>
+                <a:spcPts val="1957"/>
               </a:lnSpc>
             </a:pPr>
             <a:r>
-              <a:rPr sz="2200" b="1">
+              <a:rPr sz="1350" b="1" spc="120">
                 <a:solidFill>
                   <a:srgbClr val="FFFFFF"/>
                 </a:solidFill>
@@ -3759,14 +3237,14 @@
       </p:sp>
       <p:sp>
         <p:nvSpPr>
-          <p:cNvPr id="24" name="텍스트"/>
+          <p:cNvPr id="6" name="텍스트"/>
           <p:cNvSpPr txBox="1"/>
           <p:nvPr/>
         </p:nvSpPr>
         <p:spPr>
           <a:xfrm>
-            <a:off x="252000" y="1173600"/>
-            <a:ext cx="2016000" cy="171451"/>
+            <a:off x="252000" y="828000"/>
+            <a:ext cx="1800000" cy="133351"/>
           </a:xfrm>
           <a:prstGeom prst="rect">
             <a:avLst/>
@@ -3781,11 +3259,11 @@
           <a:p>
             <a:pPr algn="l">
               <a:lnSpc>
-                <a:spcPts val="1305"/>
+                <a:spcPts val="1015"/>
               </a:lnSpc>
             </a:pPr>
             <a:r>
-              <a:rPr sz="900" b="0">
+              <a:rPr sz="700" b="0" spc="60">
                 <a:solidFill>
                   <a:srgbClr val="A3A9B5"/>
                 </a:solidFill>
@@ -3799,14 +3277,14 @@
       </p:sp>
       <p:sp>
         <p:nvSpPr>
-          <p:cNvPr id="25" name="텍스트"/>
+          <p:cNvPr id="7" name="텍스트"/>
           <p:cNvSpPr txBox="1"/>
           <p:nvPr/>
         </p:nvSpPr>
         <p:spPr>
           <a:xfrm>
-            <a:off x="1620000" y="1339200"/>
-            <a:ext cx="1368000" cy="133351"/>
+            <a:off x="252000" y="1411200"/>
+            <a:ext cx="900000" cy="91441"/>
           </a:xfrm>
           <a:prstGeom prst="rect">
             <a:avLst/>
@@ -3819,13 +3297,53 @@
           </a:bodyPr>
           <a:lstStyle/>
           <a:p>
-            <a:pPr algn="r">
+            <a:pPr algn="l">
               <a:lnSpc>
-                <a:spcPts val="1015"/>
+                <a:spcPts val="696"/>
               </a:lnSpc>
             </a:pPr>
             <a:r>
-              <a:rPr sz="700" b="0">
+              <a:rPr sz="480" b="1" spc="140">
+                <a:solidFill>
+                  <a:srgbClr val="A3A9B5"/>
+                </a:solidFill>
+                <a:latin typeface="맑은 고딕"/>
+                <a:ea typeface="맑은 고딕"/>
+              </a:rPr>
+              <a:t>TEL</a:t>
+            </a:r>
+          </a:p>
+        </p:txBody>
+      </p:sp>
+      <p:sp>
+        <p:nvSpPr>
+          <p:cNvPr id="8" name="텍스트"/>
+          <p:cNvSpPr txBox="1"/>
+          <p:nvPr/>
+        </p:nvSpPr>
+        <p:spPr>
+          <a:xfrm>
+            <a:off x="252000" y="1512000"/>
+            <a:ext cx="900000" cy="120016"/>
+          </a:xfrm>
+          <a:prstGeom prst="rect">
+            <a:avLst/>
+          </a:prstGeom>
+          <a:noFill/>
+        </p:spPr>
+        <p:txBody>
+          <a:bodyPr wrap="square" lIns="0" rIns="0" tIns="0" bIns="0" anchor="t">
+            <a:spAutoFit/>
+          </a:bodyPr>
+          <a:lstStyle/>
+          <a:p>
+            <a:pPr algn="l">
+              <a:lnSpc>
+                <a:spcPts val="913"/>
+              </a:lnSpc>
+            </a:pPr>
+            <a:r>
+              <a:rPr sz="630" b="0">
                 <a:solidFill>
                   <a:srgbClr val="FFFFFF"/>
                 </a:solidFill>
@@ -3837,16 +3355,37 @@
           </a:p>
         </p:txBody>
       </p:sp>
-      <p:sp>
-        <p:nvSpPr>
-          <p:cNvPr id="26" name="텍스트"/>
+      <p:cxnSp>
+        <p:nvCxnSpPr>
+          <p:cNvPr id="9" name="Connector 8"/>
+          <p:cNvCxnSpPr/>
+          <p:nvPr/>
+        </p:nvCxnSpPr>
+        <p:spPr>
+          <a:xfrm>
+            <a:off x="1072800" y="1411200"/>
+            <a:ext cx="0" cy="201600"/>
+          </a:xfrm>
+          <a:prstGeom prst="line">
+            <a:avLst/>
+          </a:prstGeom>
+          <a:ln w="3600">
+            <a:solidFill>
+              <a:srgbClr val="2A2F38"/>
+            </a:solidFill>
+          </a:ln>
+        </p:spPr>
+      </p:cxnSp>
+      <p:sp>
+        <p:nvSpPr>
+          <p:cNvPr id="10" name="텍스트"/>
           <p:cNvSpPr txBox="1"/>
           <p:nvPr/>
         </p:nvSpPr>
         <p:spPr>
           <a:xfrm>
-            <a:off x="1620000" y="1476000"/>
-            <a:ext cx="1368000" cy="133351"/>
+            <a:off x="1152000" y="1411200"/>
+            <a:ext cx="1008000" cy="91441"/>
           </a:xfrm>
           <a:prstGeom prst="rect">
             <a:avLst/>
@@ -3859,13 +3398,53 @@
           </a:bodyPr>
           <a:lstStyle/>
           <a:p>
-            <a:pPr algn="r">
+            <a:pPr algn="l">
               <a:lnSpc>
-                <a:spcPts val="1015"/>
+                <a:spcPts val="696"/>
               </a:lnSpc>
             </a:pPr>
             <a:r>
-              <a:rPr sz="700" b="0">
+              <a:rPr sz="480" b="1" spc="140">
+                <a:solidFill>
+                  <a:srgbClr val="A3A9B5"/>
+                </a:solidFill>
+                <a:latin typeface="맑은 고딕"/>
+                <a:ea typeface="맑은 고딕"/>
+              </a:rPr>
+              <a:t>MAIL</a:t>
+            </a:r>
+          </a:p>
+        </p:txBody>
+      </p:sp>
+      <p:sp>
+        <p:nvSpPr>
+          <p:cNvPr id="11" name="텍스트"/>
+          <p:cNvSpPr txBox="1"/>
+          <p:nvPr/>
+        </p:nvSpPr>
+        <p:spPr>
+          <a:xfrm>
+            <a:off x="1152000" y="1512000"/>
+            <a:ext cx="1008000" cy="120016"/>
+          </a:xfrm>
+          <a:prstGeom prst="rect">
+            <a:avLst/>
+          </a:prstGeom>
+          <a:noFill/>
+        </p:spPr>
+        <p:txBody>
+          <a:bodyPr wrap="square" lIns="0" rIns="0" tIns="0" bIns="0" anchor="t">
+            <a:spAutoFit/>
+          </a:bodyPr>
+          <a:lstStyle/>
+          <a:p>
+            <a:pPr algn="l">
+              <a:lnSpc>
+                <a:spcPts val="913"/>
+              </a:lnSpc>
+            </a:pPr>
+            <a:r>
+              <a:rPr sz="630" b="0">
                 <a:solidFill>
                   <a:srgbClr val="FFFFFF"/>
                 </a:solidFill>
@@ -3877,16 +3456,37 @@
           </a:p>
         </p:txBody>
       </p:sp>
-      <p:sp>
-        <p:nvSpPr>
-          <p:cNvPr id="27" name="텍스트"/>
+      <p:cxnSp>
+        <p:nvCxnSpPr>
+          <p:cNvPr id="12" name="Connector 11"/>
+          <p:cNvCxnSpPr/>
+          <p:nvPr/>
+        </p:nvCxnSpPr>
+        <p:spPr>
+          <a:xfrm>
+            <a:off x="2080800" y="1411200"/>
+            <a:ext cx="0" cy="201600"/>
+          </a:xfrm>
+          <a:prstGeom prst="line">
+            <a:avLst/>
+          </a:prstGeom>
+          <a:ln w="3600">
+            <a:solidFill>
+              <a:srgbClr val="2A2F38"/>
+            </a:solidFill>
+          </a:ln>
+        </p:spPr>
+      </p:cxnSp>
+      <p:sp>
+        <p:nvSpPr>
+          <p:cNvPr id="13" name="텍스트"/>
           <p:cNvSpPr txBox="1"/>
           <p:nvPr/>
         </p:nvSpPr>
         <p:spPr>
           <a:xfrm>
-            <a:off x="1620000" y="1612800"/>
-            <a:ext cx="1368000" cy="133351"/>
+            <a:off x="2160000" y="1411200"/>
+            <a:ext cx="972000" cy="91441"/>
           </a:xfrm>
           <a:prstGeom prst="rect">
             <a:avLst/>
@@ -3899,13 +3499,53 @@
           </a:bodyPr>
           <a:lstStyle/>
           <a:p>
-            <a:pPr algn="r">
+            <a:pPr algn="l">
               <a:lnSpc>
-                <a:spcPts val="1015"/>
+                <a:spcPts val="696"/>
               </a:lnSpc>
             </a:pPr>
             <a:r>
-              <a:rPr sz="700" b="0">
+              <a:rPr sz="480" b="1" spc="140">
+                <a:solidFill>
+                  <a:srgbClr val="A3A9B5"/>
+                </a:solidFill>
+                <a:latin typeface="맑은 고딕"/>
+                <a:ea typeface="맑은 고딕"/>
+              </a:rPr>
+              <a:t>ADDR</a:t>
+            </a:r>
+          </a:p>
+        </p:txBody>
+      </p:sp>
+      <p:sp>
+        <p:nvSpPr>
+          <p:cNvPr id="14" name="텍스트"/>
+          <p:cNvSpPr txBox="1"/>
+          <p:nvPr/>
+        </p:nvSpPr>
+        <p:spPr>
+          <a:xfrm>
+            <a:off x="2160000" y="1512000"/>
+            <a:ext cx="972000" cy="120016"/>
+          </a:xfrm>
+          <a:prstGeom prst="rect">
+            <a:avLst/>
+          </a:prstGeom>
+          <a:noFill/>
+        </p:spPr>
+        <p:txBody>
+          <a:bodyPr wrap="square" lIns="0" rIns="0" tIns="0" bIns="0" anchor="t">
+            <a:spAutoFit/>
+          </a:bodyPr>
+          <a:lstStyle/>
+          <a:p>
+            <a:pPr algn="l">
+              <a:lnSpc>
+                <a:spcPts val="913"/>
+              </a:lnSpc>
+            </a:pPr>
+            <a:r>
+              <a:rPr sz="630" b="0">
                 <a:solidFill>
                   <a:srgbClr val="FFFFFF"/>
                 </a:solidFill>
@@ -3943,248 +3583,184 @@
         <p:nvPr/>
       </p:nvGrpSpPr>
       <p:grpSpPr/>
-      <p:sp>
-        <p:nvSpPr>
-          <p:cNvPr id="2" name="Freeform 1"/>
-          <p:cNvSpPr/>
+      <p:cxnSp>
+        <p:nvCxnSpPr>
+          <p:cNvPr id="2" name="Connector 1"/>
+          <p:cNvCxnSpPr/>
           <p:nvPr/>
-        </p:nvSpPr>
-        <p:spPr>
-          <a:xfrm>
-            <a:off x="0" y="0"/>
-            <a:ext cx="1080000" cy="1080000"/>
-          </a:xfrm>
-          <a:custGeom>
+        </p:nvCxnSpPr>
+        <p:spPr>
+          <a:xfrm>
+            <a:off x="79200" y="108000"/>
+            <a:ext cx="57600" cy="0"/>
+          </a:xfrm>
+          <a:prstGeom prst="line">
             <a:avLst/>
-            <a:gdLst/>
-            <a:ahLst/>
-            <a:cxnLst/>
-            <a:rect l="l" t="t" r="r" b="b"/>
-            <a:pathLst>
-              <a:path w="1080000" h="1080000">
-                <a:moveTo>
-                  <a:pt x="0" y="0"/>
-                </a:moveTo>
-                <a:lnTo>
-                  <a:pt x="1080000" y="0"/>
-                </a:lnTo>
-                <a:lnTo>
-                  <a:pt x="1077688" y="70635"/>
-                </a:lnTo>
-                <a:lnTo>
-                  <a:pt x="1070760" y="140968"/>
-                </a:lnTo>
-                <a:lnTo>
-                  <a:pt x="1059248" y="210698"/>
-                </a:lnTo>
-                <a:lnTo>
-                  <a:pt x="1043200" y="279525"/>
-                </a:lnTo>
-                <a:lnTo>
-                  <a:pt x="1022685" y="347155"/>
-                </a:lnTo>
-                <a:lnTo>
-                  <a:pt x="997790" y="413298"/>
-                </a:lnTo>
-                <a:lnTo>
-                  <a:pt x="968623" y="477672"/>
-                </a:lnTo>
-                <a:lnTo>
-                  <a:pt x="935307" y="540000"/>
-                </a:lnTo>
-                <a:lnTo>
-                  <a:pt x="897987" y="600016"/>
-                </a:lnTo>
-                <a:lnTo>
-                  <a:pt x="856822" y="657462"/>
-                </a:lnTo>
-                <a:lnTo>
-                  <a:pt x="811987" y="712093"/>
-                </a:lnTo>
-                <a:lnTo>
-                  <a:pt x="763675" y="763675"/>
-                </a:lnTo>
-                <a:lnTo>
-                  <a:pt x="712093" y="811987"/>
-                </a:lnTo>
-                <a:lnTo>
-                  <a:pt x="657462" y="856822"/>
-                </a:lnTo>
-                <a:lnTo>
-                  <a:pt x="600016" y="897987"/>
-                </a:lnTo>
-                <a:lnTo>
-                  <a:pt x="540000" y="935307"/>
-                </a:lnTo>
-                <a:lnTo>
-                  <a:pt x="477672" y="968623"/>
-                </a:lnTo>
-                <a:lnTo>
-                  <a:pt x="413298" y="997790"/>
-                </a:lnTo>
-                <a:lnTo>
-                  <a:pt x="347155" y="1022685"/>
-                </a:lnTo>
-                <a:lnTo>
-                  <a:pt x="279525" y="1043200"/>
-                </a:lnTo>
-                <a:lnTo>
-                  <a:pt x="210698" y="1059248"/>
-                </a:lnTo>
-                <a:lnTo>
-                  <a:pt x="140968" y="1070760"/>
-                </a:lnTo>
-                <a:lnTo>
-                  <a:pt x="70635" y="1077688"/>
-                </a:lnTo>
-                <a:lnTo>
-                  <a:pt x="0" y="1080000"/>
-                </a:lnTo>
-                <a:close/>
-              </a:path>
-            </a:pathLst>
-          </a:custGeom>
-          <a:solidFill>
-            <a:srgbClr val="00C2C0"/>
-          </a:solidFill>
-          <a:ln>
-            <a:noFill/>
+          </a:prstGeom>
+          <a:ln w="3600">
+            <a:solidFill>
+              <a:srgbClr val="2A2F38"/>
+            </a:solidFill>
           </a:ln>
         </p:spPr>
-        <p:txBody>
-          <a:bodyPr rtlCol="0" anchor="ctr"/>
-          <a:lstStyle/>
-          <a:p>
-            <a:pPr algn="ctr"/>
-          </a:p>
-        </p:txBody>
-      </p:sp>
-      <p:sp>
-        <p:nvSpPr>
-          <p:cNvPr id="3" name="Freeform 2"/>
-          <p:cNvSpPr/>
+      </p:cxnSp>
+      <p:cxnSp>
+        <p:nvCxnSpPr>
+          <p:cNvPr id="3" name="Connector 2"/>
+          <p:cNvCxnSpPr/>
           <p:nvPr/>
-        </p:nvSpPr>
-        <p:spPr>
-          <a:xfrm>
-            <a:off x="0" y="0"/>
-            <a:ext cx="684000" cy="684000"/>
-          </a:xfrm>
-          <a:custGeom>
+        </p:nvCxnSpPr>
+        <p:spPr>
+          <a:xfrm>
+            <a:off x="108000" y="79200"/>
+            <a:ext cx="0" cy="57600"/>
+          </a:xfrm>
+          <a:prstGeom prst="line">
             <a:avLst/>
-            <a:gdLst/>
-            <a:ahLst/>
-            <a:cxnLst/>
-            <a:rect l="l" t="t" r="r" b="b"/>
-            <a:pathLst>
-              <a:path w="684000" h="684000">
-                <a:moveTo>
-                  <a:pt x="0" y="0"/>
-                </a:moveTo>
-                <a:lnTo>
-                  <a:pt x="684000" y="0"/>
-                </a:lnTo>
-                <a:lnTo>
-                  <a:pt x="682536" y="44736"/>
-                </a:lnTo>
-                <a:lnTo>
-                  <a:pt x="678148" y="89280"/>
-                </a:lnTo>
-                <a:lnTo>
-                  <a:pt x="670857" y="133442"/>
-                </a:lnTo>
-                <a:lnTo>
-                  <a:pt x="660693" y="177032"/>
-                </a:lnTo>
-                <a:lnTo>
-                  <a:pt x="647700" y="219865"/>
-                </a:lnTo>
-                <a:lnTo>
-                  <a:pt x="631934" y="261755"/>
-                </a:lnTo>
-                <a:lnTo>
-                  <a:pt x="613461" y="302525"/>
-                </a:lnTo>
-                <a:lnTo>
-                  <a:pt x="592361" y="342000"/>
-                </a:lnTo>
-                <a:lnTo>
-                  <a:pt x="568725" y="380010"/>
-                </a:lnTo>
-                <a:lnTo>
-                  <a:pt x="542654" y="416393"/>
-                </a:lnTo>
-                <a:lnTo>
-                  <a:pt x="514258" y="450993"/>
-                </a:lnTo>
-                <a:lnTo>
-                  <a:pt x="483661" y="483661"/>
-                </a:lnTo>
-                <a:lnTo>
-                  <a:pt x="450993" y="514258"/>
-                </a:lnTo>
-                <a:lnTo>
-                  <a:pt x="416393" y="542654"/>
-                </a:lnTo>
-                <a:lnTo>
-                  <a:pt x="380010" y="568725"/>
-                </a:lnTo>
-                <a:lnTo>
-                  <a:pt x="342000" y="592361"/>
-                </a:lnTo>
-                <a:lnTo>
-                  <a:pt x="302525" y="613461"/>
-                </a:lnTo>
-                <a:lnTo>
-                  <a:pt x="261755" y="631934"/>
-                </a:lnTo>
-                <a:lnTo>
-                  <a:pt x="219865" y="647700"/>
-                </a:lnTo>
-                <a:lnTo>
-                  <a:pt x="177032" y="660693"/>
-                </a:lnTo>
-                <a:lnTo>
-                  <a:pt x="133442" y="670857"/>
-                </a:lnTo>
-                <a:lnTo>
-                  <a:pt x="89280" y="678148"/>
-                </a:lnTo>
-                <a:lnTo>
-                  <a:pt x="44736" y="682536"/>
-                </a:lnTo>
-                <a:lnTo>
-                  <a:pt x="0" y="684000"/>
-                </a:lnTo>
-                <a:close/>
-              </a:path>
-            </a:pathLst>
-          </a:custGeom>
-          <a:solidFill>
-            <a:srgbClr val="26292D"/>
-          </a:solidFill>
-          <a:ln>
-            <a:noFill/>
+          </a:prstGeom>
+          <a:ln w="3600">
+            <a:solidFill>
+              <a:srgbClr val="2A2F38"/>
+            </a:solidFill>
           </a:ln>
         </p:spPr>
-        <p:txBody>
-          <a:bodyPr rtlCol="0" anchor="ctr"/>
-          <a:lstStyle/>
-          <a:p>
-            <a:pPr algn="ctr"/>
-          </a:p>
-        </p:txBody>
-      </p:sp>
-      <p:sp>
-        <p:nvSpPr>
-          <p:cNvPr id="4" name="텍스트"/>
+      </p:cxnSp>
+      <p:cxnSp>
+        <p:nvCxnSpPr>
+          <p:cNvPr id="4" name="Connector 3"/>
+          <p:cNvCxnSpPr/>
+          <p:nvPr/>
+        </p:nvCxnSpPr>
+        <p:spPr>
+          <a:xfrm>
+            <a:off x="3103200" y="108000"/>
+            <a:ext cx="57600" cy="0"/>
+          </a:xfrm>
+          <a:prstGeom prst="line">
+            <a:avLst/>
+          </a:prstGeom>
+          <a:ln w="3600">
+            <a:solidFill>
+              <a:srgbClr val="2A2F38"/>
+            </a:solidFill>
+          </a:ln>
+        </p:spPr>
+      </p:cxnSp>
+      <p:cxnSp>
+        <p:nvCxnSpPr>
+          <p:cNvPr id="5" name="Connector 4"/>
+          <p:cNvCxnSpPr/>
+          <p:nvPr/>
+        </p:nvCxnSpPr>
+        <p:spPr>
+          <a:xfrm>
+            <a:off x="3132000" y="79200"/>
+            <a:ext cx="0" cy="57600"/>
+          </a:xfrm>
+          <a:prstGeom prst="line">
+            <a:avLst/>
+          </a:prstGeom>
+          <a:ln w="3600">
+            <a:solidFill>
+              <a:srgbClr val="2A2F38"/>
+            </a:solidFill>
+          </a:ln>
+        </p:spPr>
+      </p:cxnSp>
+      <p:cxnSp>
+        <p:nvCxnSpPr>
+          <p:cNvPr id="6" name="Connector 5"/>
+          <p:cNvCxnSpPr/>
+          <p:nvPr/>
+        </p:nvCxnSpPr>
+        <p:spPr>
+          <a:xfrm>
+            <a:off x="79200" y="1692000"/>
+            <a:ext cx="57600" cy="0"/>
+          </a:xfrm>
+          <a:prstGeom prst="line">
+            <a:avLst/>
+          </a:prstGeom>
+          <a:ln w="3600">
+            <a:solidFill>
+              <a:srgbClr val="2A2F38"/>
+            </a:solidFill>
+          </a:ln>
+        </p:spPr>
+      </p:cxnSp>
+      <p:cxnSp>
+        <p:nvCxnSpPr>
+          <p:cNvPr id="7" name="Connector 6"/>
+          <p:cNvCxnSpPr/>
+          <p:nvPr/>
+        </p:nvCxnSpPr>
+        <p:spPr>
+          <a:xfrm>
+            <a:off x="108000" y="1663200"/>
+            <a:ext cx="0" cy="57600"/>
+          </a:xfrm>
+          <a:prstGeom prst="line">
+            <a:avLst/>
+          </a:prstGeom>
+          <a:ln w="3600">
+            <a:solidFill>
+              <a:srgbClr val="2A2F38"/>
+            </a:solidFill>
+          </a:ln>
+        </p:spPr>
+      </p:cxnSp>
+      <p:cxnSp>
+        <p:nvCxnSpPr>
+          <p:cNvPr id="8" name="Connector 7"/>
+          <p:cNvCxnSpPr/>
+          <p:nvPr/>
+        </p:nvCxnSpPr>
+        <p:spPr>
+          <a:xfrm>
+            <a:off x="3103200" y="1692000"/>
+            <a:ext cx="57600" cy="0"/>
+          </a:xfrm>
+          <a:prstGeom prst="line">
+            <a:avLst/>
+          </a:prstGeom>
+          <a:ln w="3600">
+            <a:solidFill>
+              <a:srgbClr val="2A2F38"/>
+            </a:solidFill>
+          </a:ln>
+        </p:spPr>
+      </p:cxnSp>
+      <p:cxnSp>
+        <p:nvCxnSpPr>
+          <p:cNvPr id="9" name="Connector 8"/>
+          <p:cNvCxnSpPr/>
+          <p:nvPr/>
+        </p:nvCxnSpPr>
+        <p:spPr>
+          <a:xfrm>
+            <a:off x="3132000" y="1663200"/>
+            <a:ext cx="0" cy="57600"/>
+          </a:xfrm>
+          <a:prstGeom prst="line">
+            <a:avLst/>
+          </a:prstGeom>
+          <a:ln w="3600">
+            <a:solidFill>
+              <a:srgbClr val="2A2F38"/>
+            </a:solidFill>
+          </a:ln>
+        </p:spPr>
+      </p:cxnSp>
+      <p:sp>
+        <p:nvSpPr>
+          <p:cNvPr id="10" name="텍스트"/>
           <p:cNvSpPr txBox="1"/>
           <p:nvPr/>
         </p:nvSpPr>
         <p:spPr>
           <a:xfrm>
-            <a:off x="1188000" y="1044000"/>
-            <a:ext cx="1800000" cy="432000"/>
+            <a:off x="252000" y="288000"/>
+            <a:ext cx="2520000" cy="123826"/>
           </a:xfrm>
           <a:prstGeom prst="rect">
             <a:avLst/>
@@ -4197,70 +3773,13 @@
           </a:bodyPr>
           <a:lstStyle/>
           <a:p>
-            <a:pPr algn="r">
-              <a:lnSpc>
-                <a:spcPts val="1739"/>
-              </a:lnSpc>
-            </a:pPr>
-            <a:r>
-              <a:rPr sz="1200" b="1">
-                <a:solidFill>
-                  <a:srgbClr val="FFFFFF"/>
-                </a:solidFill>
-                <a:latin typeface="맑은 고딕"/>
-                <a:ea typeface="맑은 고딕"/>
-              </a:rPr>
-              <a:t>자유롭게,</a:t>
-            </a:r>
-          </a:p>
-          <a:p>
-            <a:pPr algn="r">
-              <a:lnSpc>
-                <a:spcPts val="1739"/>
-              </a:lnSpc>
-            </a:pPr>
-            <a:r>
-              <a:rPr sz="1200" b="1">
-                <a:solidFill>
-                  <a:srgbClr val="FFFFFF"/>
-                </a:solidFill>
-                <a:latin typeface="맑은 고딕"/>
-                <a:ea typeface="맑은 고딕"/>
-              </a:rPr>
-              <a:t>그러나 책임 있게</a:t>
-            </a:r>
-          </a:p>
-        </p:txBody>
-      </p:sp>
-      <p:sp>
-        <p:nvSpPr>
-          <p:cNvPr id="5" name="텍스트"/>
-          <p:cNvSpPr txBox="1"/>
-          <p:nvPr/>
-        </p:nvSpPr>
-        <p:spPr>
-          <a:xfrm>
-            <a:off x="1188000" y="1526400"/>
-            <a:ext cx="1800000" cy="123826"/>
-          </a:xfrm>
-          <a:prstGeom prst="rect">
-            <a:avLst/>
-          </a:prstGeom>
-          <a:noFill/>
-        </p:spPr>
-        <p:txBody>
-          <a:bodyPr wrap="square" lIns="0" rIns="0" tIns="0" bIns="0" anchor="t">
-            <a:spAutoFit/>
-          </a:bodyPr>
-          <a:lstStyle/>
-          <a:p>
-            <a:pPr algn="r">
+            <a:pPr algn="ctr">
               <a:lnSpc>
                 <a:spcPts val="942"/>
               </a:lnSpc>
             </a:pPr>
             <a:r>
-              <a:rPr sz="650" b="1" spc="200">
+              <a:rPr sz="650" b="1" spc="220">
                 <a:solidFill>
                   <a:srgbClr val="A3A9B5"/>
                 </a:solidFill>
@@ -4268,6 +3787,237 @@
                 <a:ea typeface="맑은 고딕"/>
               </a:rPr>
               <a:t>스튜디오 이름</a:t>
+            </a:r>
+          </a:p>
+        </p:txBody>
+      </p:sp>
+      <p:sp>
+        <p:nvSpPr>
+          <p:cNvPr id="11" name="Rectangle 10"/>
+          <p:cNvSpPr/>
+          <p:nvPr/>
+        </p:nvSpPr>
+        <p:spPr>
+          <a:xfrm>
+            <a:off x="1530000" y="453600"/>
+            <a:ext cx="180000" cy="14400"/>
+          </a:xfrm>
+          <a:prstGeom prst="rect">
+            <a:avLst/>
+          </a:prstGeom>
+          <a:solidFill>
+            <a:srgbClr val="00C2C0"/>
+          </a:solidFill>
+          <a:ln>
+            <a:noFill/>
+          </a:ln>
+        </p:spPr>
+        <p:txBody>
+          <a:bodyPr rtlCol="0" anchor="ctr"/>
+          <a:lstStyle/>
+          <a:p>
+            <a:pPr algn="ctr"/>
+          </a:p>
+        </p:txBody>
+      </p:sp>
+      <p:sp>
+        <p:nvSpPr>
+          <p:cNvPr id="12" name="텍스트"/>
+          <p:cNvSpPr txBox="1"/>
+          <p:nvPr/>
+        </p:nvSpPr>
+        <p:spPr>
+          <a:xfrm>
+            <a:off x="360000" y="619200"/>
+            <a:ext cx="2520000" cy="99061"/>
+          </a:xfrm>
+          <a:prstGeom prst="rect">
+            <a:avLst/>
+          </a:prstGeom>
+          <a:noFill/>
+        </p:spPr>
+        <p:txBody>
+          <a:bodyPr wrap="square" lIns="0" rIns="0" tIns="0" bIns="0" anchor="t">
+            <a:spAutoFit/>
+          </a:bodyPr>
+          <a:lstStyle/>
+          <a:p>
+            <a:pPr algn="ctr">
+              <a:lnSpc>
+                <a:spcPts val="754"/>
+              </a:lnSpc>
+            </a:pPr>
+            <a:r>
+              <a:rPr sz="520" b="1" spc="240">
+                <a:solidFill>
+                  <a:srgbClr val="A3A9B5"/>
+                </a:solidFill>
+                <a:latin typeface="맑은 고딕"/>
+                <a:ea typeface="맑은 고딕"/>
+              </a:rPr>
+              <a:t>작업 분야</a:t>
+            </a:r>
+          </a:p>
+        </p:txBody>
+      </p:sp>
+      <p:sp>
+        <p:nvSpPr>
+          <p:cNvPr id="13" name="텍스트"/>
+          <p:cNvSpPr txBox="1"/>
+          <p:nvPr/>
+        </p:nvSpPr>
+        <p:spPr>
+          <a:xfrm>
+            <a:off x="360000" y="741600"/>
+            <a:ext cx="2520000" cy="396000"/>
+          </a:xfrm>
+          <a:prstGeom prst="rect">
+            <a:avLst/>
+          </a:prstGeom>
+          <a:noFill/>
+        </p:spPr>
+        <p:txBody>
+          <a:bodyPr wrap="square" lIns="0" rIns="0" tIns="0" bIns="0" anchor="t">
+            <a:spAutoFit/>
+          </a:bodyPr>
+          <a:lstStyle/>
+          <a:p>
+            <a:pPr algn="ctr">
+              <a:lnSpc>
+                <a:spcPts val="1188"/>
+              </a:lnSpc>
+            </a:pPr>
+            <a:r>
+              <a:rPr sz="819" b="1">
+                <a:solidFill>
+                  <a:srgbClr val="FFFFFF"/>
+                </a:solidFill>
+                <a:latin typeface="맑은 고딕"/>
+                <a:ea typeface="맑은 고딕"/>
+              </a:rPr>
+              <a:t>일러스트  ·  웹툰  ·  모션 그래픽  ·  행사 촬영</a:t>
+            </a:r>
+          </a:p>
+        </p:txBody>
+      </p:sp>
+      <p:cxnSp>
+        <p:nvCxnSpPr>
+          <p:cNvPr id="14" name="Connector 13"/>
+          <p:cNvCxnSpPr/>
+          <p:nvPr/>
+        </p:nvCxnSpPr>
+        <p:spPr>
+          <a:xfrm>
+            <a:off x="360000" y="1224000"/>
+            <a:ext cx="2520000" cy="0"/>
+          </a:xfrm>
+          <a:prstGeom prst="line">
+            <a:avLst/>
+          </a:prstGeom>
+          <a:ln w="3600">
+            <a:solidFill>
+              <a:srgbClr val="2A2F38"/>
+            </a:solidFill>
+          </a:ln>
+        </p:spPr>
+      </p:cxnSp>
+      <p:sp>
+        <p:nvSpPr>
+          <p:cNvPr id="15" name="텍스트"/>
+          <p:cNvSpPr txBox="1"/>
+          <p:nvPr/>
+        </p:nvSpPr>
+        <p:spPr>
+          <a:xfrm>
+            <a:off x="360000" y="1317600"/>
+            <a:ext cx="1224000" cy="118111"/>
+          </a:xfrm>
+          <a:prstGeom prst="rect">
+            <a:avLst/>
+          </a:prstGeom>
+          <a:noFill/>
+        </p:spPr>
+        <p:txBody>
+          <a:bodyPr wrap="square" lIns="0" rIns="0" tIns="0" bIns="0" anchor="t">
+            <a:spAutoFit/>
+          </a:bodyPr>
+          <a:lstStyle/>
+          <a:p>
+            <a:pPr algn="ctr">
+              <a:lnSpc>
+                <a:spcPts val="899"/>
+              </a:lnSpc>
+            </a:pPr>
+            <a:r>
+              <a:rPr sz="620" b="0">
+                <a:solidFill>
+                  <a:srgbClr val="FFFFFF"/>
+                </a:solidFill>
+                <a:latin typeface="맑은 고딕"/>
+                <a:ea typeface="맑은 고딕"/>
+              </a:rPr>
+              <a:t>예약 후 방문</a:t>
+            </a:r>
+          </a:p>
+        </p:txBody>
+      </p:sp>
+      <p:cxnSp>
+        <p:nvCxnSpPr>
+          <p:cNvPr id="16" name="Connector 15"/>
+          <p:cNvCxnSpPr/>
+          <p:nvPr/>
+        </p:nvCxnSpPr>
+        <p:spPr>
+          <a:xfrm>
+            <a:off x="1620000" y="1296000"/>
+            <a:ext cx="0" cy="180000"/>
+          </a:xfrm>
+          <a:prstGeom prst="line">
+            <a:avLst/>
+          </a:prstGeom>
+          <a:ln w="3600">
+            <a:solidFill>
+              <a:srgbClr val="2A2F38"/>
+            </a:solidFill>
+          </a:ln>
+        </p:spPr>
+      </p:cxnSp>
+      <p:sp>
+        <p:nvSpPr>
+          <p:cNvPr id="17" name="텍스트"/>
+          <p:cNvSpPr txBox="1"/>
+          <p:nvPr/>
+        </p:nvSpPr>
+        <p:spPr>
+          <a:xfrm>
+            <a:off x="1656000" y="1317600"/>
+            <a:ext cx="1224000" cy="118111"/>
+          </a:xfrm>
+          <a:prstGeom prst="rect">
+            <a:avLst/>
+          </a:prstGeom>
+          <a:noFill/>
+        </p:spPr>
+        <p:txBody>
+          <a:bodyPr wrap="square" lIns="0" rIns="0" tIns="0" bIns="0" anchor="t">
+            <a:spAutoFit/>
+          </a:bodyPr>
+          <a:lstStyle/>
+          <a:p>
+            <a:pPr algn="ctr">
+              <a:lnSpc>
+                <a:spcPts val="899"/>
+              </a:lnSpc>
+            </a:pPr>
+            <a:r>
+              <a:rPr sz="620" b="0">
+                <a:solidFill>
+                  <a:srgbClr val="FFFFFF"/>
+                </a:solidFill>
+                <a:latin typeface="맑은 고딕"/>
+                <a:ea typeface="맑은 고딕"/>
+              </a:rPr>
+              <a:t>blog.example.com</a:t>
             </a:r>
           </a:p>
         </p:txBody>
